--- a/pptx/EOD-Project-Finance-Portfolio.pptx
+++ b/pptx/EOD-Project-Finance-Portfolio.pptx
@@ -1826,7 +1826,7 @@
         <p:spPr>
           <a:xfrm>
             <a:off x="566928" y="2706624"/>
-            <a:ext cx="10241280" cy="928878"/>
+            <a:ext cx="10241280" cy="911352"/>
           </a:xfrm>
           <a:prstGeom prst="rect">
             <a:avLst/>
@@ -1867,7 +1867,7 @@
         </p:nvSpPr>
         <p:spPr>
           <a:xfrm>
-            <a:off x="566928" y="3781806"/>
+            <a:off x="566928" y="3764280"/>
             <a:ext cx="10241280" cy="694944"/>
           </a:xfrm>
           <a:prstGeom prst="rect">
@@ -2049,7 +2049,7 @@
             <a:r>
               <a:rPr lang="en-US" sz="1000" dirty="0">
                 <a:solidFill>
-                  <a:srgbClr val="7C889B"/>
+                  <a:srgbClr val="A8B2C4"/>
                 </a:solidFill>
                 <a:latin typeface="Calibri" pitchFamily="34" charset="0"/>
                 <a:ea typeface="Calibri" pitchFamily="34" charset="-122"/>
@@ -2169,7 +2169,7 @@
             <a:r>
               <a:rPr lang="en-US" sz="1000" dirty="0">
                 <a:solidFill>
-                  <a:srgbClr val="7C889B"/>
+                  <a:srgbClr val="A8B2C4"/>
                 </a:solidFill>
                 <a:latin typeface="Calibri" pitchFamily="34" charset="0"/>
                 <a:ea typeface="Calibri" pitchFamily="34" charset="-122"/>
@@ -2289,7 +2289,7 @@
             <a:r>
               <a:rPr lang="en-US" sz="1000" dirty="0">
                 <a:solidFill>
-                  <a:srgbClr val="7C889B"/>
+                  <a:srgbClr val="A8B2C4"/>
                 </a:solidFill>
                 <a:latin typeface="Calibri" pitchFamily="34" charset="0"/>
                 <a:ea typeface="Calibri" pitchFamily="34" charset="-122"/>
@@ -2409,7 +2409,7 @@
             <a:r>
               <a:rPr lang="en-US" sz="1000" dirty="0">
                 <a:solidFill>
-                  <a:srgbClr val="7C889B"/>
+                  <a:srgbClr val="A8B2C4"/>
                 </a:solidFill>
                 <a:latin typeface="Calibri" pitchFamily="34" charset="0"/>
                 <a:ea typeface="Calibri" pitchFamily="34" charset="-122"/>
@@ -2559,8 +2559,8 @@
         </p:nvSpPr>
         <p:spPr>
           <a:xfrm>
-            <a:off x="566928" y="1005840"/>
-            <a:ext cx="11057839" cy="512064"/>
+            <a:off x="566928" y="950976"/>
+            <a:ext cx="11057839" cy="231140"/>
           </a:xfrm>
           <a:prstGeom prst="rect">
             <a:avLst/>
@@ -2574,12 +2574,12 @@
           <a:p>
             <a:pPr indent="0" marL="0">
               <a:lnSpc>
-                <a:spcPts val="1900"/>
+                <a:spcPts val="1750"/>
               </a:lnSpc>
               <a:buNone/>
             </a:pPr>
             <a:r>
-              <a:rPr lang="en-US" sz="1350" dirty="0">
+              <a:rPr lang="en-US" sz="1250" dirty="0">
                 <a:solidFill>
                   <a:srgbClr val="3B4660"/>
                 </a:solidFill>
@@ -2589,7 +2589,7 @@
               </a:rPr>
               <a:t>The same analysis run three times. What differs is not the method — it is how much capital each genuinely consumes, and what it earns on it.</a:t>
             </a:r>
-            <a:endParaRPr lang="en-US" sz="1350" dirty="0"/>
+            <a:endParaRPr lang="en-US" sz="1250" dirty="0"/>
           </a:p>
         </p:txBody>
       </p:sp>
@@ -2608,7 +2608,7 @@
           </p:nvPr>
         </p:nvGraphicFramePr>
         <p:xfrm>
-          <a:off x="566928" y="1627632"/>
+          <a:off x="566928" y="1310132"/>
           <a:ext cx="11057839" cy="914400"/>
         </p:xfrm>
         <a:graphic>
@@ -5910,12 +5910,12 @@
         </p:nvSpPr>
         <p:spPr>
           <a:xfrm>
-            <a:off x="566928" y="5445728"/>
-            <a:ext cx="11057839" cy="845344"/>
+            <a:off x="566928" y="5095748"/>
+            <a:ext cx="11057839" cy="1267684"/>
           </a:xfrm>
           <a:prstGeom prst="roundRect">
             <a:avLst>
-              <a:gd name="adj" fmla="val 5408"/>
+              <a:gd name="adj" fmla="val 3607"/>
             </a:avLst>
           </a:prstGeom>
           <a:solidFill>
@@ -5937,8 +5937,8 @@
         </p:nvSpPr>
         <p:spPr>
           <a:xfrm>
-            <a:off x="804672" y="5592032"/>
-            <a:ext cx="2743200" cy="201168"/>
+            <a:off x="804672" y="5205476"/>
+            <a:ext cx="2743200" cy="182880"/>
           </a:xfrm>
           <a:prstGeom prst="rect">
             <a:avLst/>
@@ -5976,8 +5976,8 @@
         </p:nvSpPr>
         <p:spPr>
           <a:xfrm>
-            <a:off x="804672" y="5793200"/>
-            <a:ext cx="10582351" cy="232220"/>
+            <a:off x="804672" y="5388356"/>
+            <a:ext cx="10582351" cy="212649"/>
           </a:xfrm>
           <a:prstGeom prst="rect">
             <a:avLst/>
@@ -5991,12 +5991,12 @@
           <a:p>
             <a:pPr indent="0" marL="0">
               <a:lnSpc>
-                <a:spcPts val="1725"/>
+                <a:spcPts val="1610"/>
               </a:lnSpc>
               <a:buNone/>
             </a:pPr>
             <a:r>
-              <a:rPr lang="en-US" sz="1500" b="1" dirty="0">
+              <a:rPr lang="en-US" sz="1400" b="1" dirty="0">
                 <a:solidFill>
                   <a:srgbClr val="0A1426"/>
                 </a:solidFill>
@@ -6006,7 +6006,7 @@
               </a:rPr>
               <a:t>The same conclusion three times, for the same reason</a:t>
             </a:r>
-            <a:endParaRPr lang="en-US" sz="1500" dirty="0"/>
+            <a:endParaRPr lang="en-US" sz="1400" dirty="0"/>
           </a:p>
         </p:txBody>
       </p:sp>
@@ -6018,8 +6018,8 @@
         </p:nvSpPr>
         <p:spPr>
           <a:xfrm>
-            <a:off x="804672" y="6098572"/>
-            <a:ext cx="10582351" cy="182880"/>
+            <a:off x="804672" y="5655869"/>
+            <a:ext cx="10582351" cy="634411"/>
           </a:xfrm>
           <a:prstGeom prst="rect">
             <a:avLst/>
@@ -6033,12 +6033,12 @@
           <a:p>
             <a:pPr indent="0" marL="0">
               <a:lnSpc>
-                <a:spcPts val="1207"/>
+                <a:spcPts val="1278"/>
               </a:lnSpc>
               <a:buNone/>
             </a:pPr>
             <a:r>
-              <a:rPr lang="en-US" sz="850" dirty="0">
+              <a:rPr lang="en-US" sz="900" dirty="0">
                 <a:solidFill>
                   <a:srgbClr val="3B4660"/>
                 </a:solidFill>
@@ -6048,7 +6048,7 @@
               </a:rPr>
               <a:t>None of the three clears an equity hurdle at project level, and it is not because any is a bad project. A single park generating ₹1–2.5 crore of mature EBITDA cannot pay a 22% return on the capital it needs and leave an operator's margin. Equity works on a portfolio and a brand; it does not work one licence at a time. Two of the three out-earn guaranteed debt comfortably — fund them with it and keep the spread.</a:t>
             </a:r>
-            <a:endParaRPr lang="en-US" sz="850" dirty="0"/>
+            <a:endParaRPr lang="en-US" sz="900" dirty="0"/>
           </a:p>
         </p:txBody>
       </p:sp>
@@ -6229,8 +6229,8 @@
         </p:nvSpPr>
         <p:spPr>
           <a:xfrm>
-            <a:off x="566928" y="1005840"/>
-            <a:ext cx="11057839" cy="512064"/>
+            <a:off x="566928" y="950976"/>
+            <a:ext cx="11057839" cy="462280"/>
           </a:xfrm>
           <a:prstGeom prst="rect">
             <a:avLst/>
@@ -6244,12 +6244,12 @@
           <a:p>
             <a:pPr indent="0" marL="0">
               <a:lnSpc>
-                <a:spcPts val="1900"/>
+                <a:spcPts val="1750"/>
               </a:lnSpc>
               <a:buNone/>
             </a:pPr>
             <a:r>
-              <a:rPr lang="en-US" sz="1350" dirty="0">
+              <a:rPr lang="en-US" sz="1250" dirty="0">
                 <a:solidFill>
                   <a:srgbClr val="3B4660"/>
                 </a:solidFill>
@@ -6259,7 +6259,7 @@
               </a:rPr>
               <a:t>Every debt structure in this pack rests on the Credit Guarantee Fund Trust for Micro and Small Enterprises. The scheme changed materially on 1 April 2025, and the change is what makes this pack possible.</a:t>
             </a:r>
-            <a:endParaRPr lang="en-US" sz="1350" dirty="0"/>
+            <a:endParaRPr lang="en-US" sz="1250" dirty="0"/>
           </a:p>
         </p:txBody>
       </p:sp>
@@ -6271,12 +6271,12 @@
         </p:nvSpPr>
         <p:spPr>
           <a:xfrm>
-            <a:off x="566928" y="1627632"/>
-            <a:ext cx="3539642" cy="1298448"/>
+            <a:off x="566928" y="1541272"/>
+            <a:ext cx="3539642" cy="1225296"/>
           </a:xfrm>
           <a:prstGeom prst="roundRect">
             <a:avLst>
-              <a:gd name="adj" fmla="val 4225"/>
+              <a:gd name="adj" fmla="val 4478"/>
             </a:avLst>
           </a:prstGeom>
           <a:solidFill>
@@ -6298,8 +6298,8 @@
         </p:nvSpPr>
         <p:spPr>
           <a:xfrm>
-            <a:off x="749808" y="1764792"/>
-            <a:ext cx="3173882" cy="219456"/>
+            <a:off x="749808" y="1660144"/>
+            <a:ext cx="3173882" cy="237744"/>
           </a:xfrm>
           <a:prstGeom prst="rect">
             <a:avLst/>
@@ -6308,14 +6308,14 @@
           <a:ln/>
         </p:spPr>
         <p:txBody>
-          <a:bodyPr wrap="square" lIns="0" tIns="0" rIns="0" bIns="0" rtlCol="0" anchor="ctr"/>
+          <a:bodyPr wrap="square" lIns="0" tIns="0" rIns="0" bIns="0" rtlCol="0" anchor="t"/>
           <a:lstStyle/>
           <a:p>
             <a:pPr indent="0" marL="0">
               <a:buNone/>
             </a:pPr>
             <a:r>
-              <a:rPr lang="en-US" sz="900" b="1" spc="120" kern="0" dirty="0">
+              <a:rPr lang="en-US" sz="850" b="1" spc="100" kern="0" dirty="0">
                 <a:solidFill>
                   <a:srgbClr val="6E7689"/>
                 </a:solidFill>
@@ -6325,7 +6325,7 @@
               </a:rPr>
               <a:t>GUARANTEE CEILING</a:t>
             </a:r>
-            <a:endParaRPr lang="en-US" sz="900" dirty="0"/>
+            <a:endParaRPr lang="en-US" sz="850" dirty="0"/>
           </a:p>
         </p:txBody>
       </p:sp>
@@ -6337,7 +6337,7 @@
         </p:nvSpPr>
         <p:spPr>
           <a:xfrm>
-            <a:off x="749808" y="1993392"/>
+            <a:off x="749808" y="1907032"/>
             <a:ext cx="3173882" cy="457200"/>
           </a:xfrm>
           <a:prstGeom prst="rect">
@@ -6347,7 +6347,9 @@
           <a:ln/>
         </p:spPr>
         <p:txBody>
-          <a:bodyPr wrap="square" lIns="0" tIns="0" rIns="0" bIns="0" rtlCol="0" anchor="t"/>
+          <a:bodyPr wrap="square" lIns="0" tIns="0" rIns="0" bIns="0" rtlCol="0" anchor="t">
+            <a:normAutofit/>
+          </a:bodyPr>
           <a:lstStyle/>
           <a:p>
             <a:pPr indent="0" marL="0">
@@ -6376,8 +6378,8 @@
         </p:nvSpPr>
         <p:spPr>
           <a:xfrm>
-            <a:off x="749808" y="2468880"/>
-            <a:ext cx="3173882" cy="384048"/>
+            <a:off x="749808" y="2382520"/>
+            <a:ext cx="3173882" cy="310896"/>
           </a:xfrm>
           <a:prstGeom prst="rect">
             <a:avLst/>
@@ -6418,12 +6420,12 @@
         </p:nvSpPr>
         <p:spPr>
           <a:xfrm>
-            <a:off x="4326026" y="1627632"/>
-            <a:ext cx="3539642" cy="1298448"/>
+            <a:off x="4326026" y="1541272"/>
+            <a:ext cx="3539642" cy="1225296"/>
           </a:xfrm>
           <a:prstGeom prst="roundRect">
             <a:avLst>
-              <a:gd name="adj" fmla="val 4225"/>
+              <a:gd name="adj" fmla="val 4478"/>
             </a:avLst>
           </a:prstGeom>
           <a:solidFill>
@@ -6445,8 +6447,8 @@
         </p:nvSpPr>
         <p:spPr>
           <a:xfrm>
-            <a:off x="4508906" y="1764792"/>
-            <a:ext cx="3173882" cy="219456"/>
+            <a:off x="4508906" y="1660144"/>
+            <a:ext cx="3173882" cy="237744"/>
           </a:xfrm>
           <a:prstGeom prst="rect">
             <a:avLst/>
@@ -6455,14 +6457,14 @@
           <a:ln/>
         </p:spPr>
         <p:txBody>
-          <a:bodyPr wrap="square" lIns="0" tIns="0" rIns="0" bIns="0" rtlCol="0" anchor="ctr"/>
+          <a:bodyPr wrap="square" lIns="0" tIns="0" rIns="0" bIns="0" rtlCol="0" anchor="t"/>
           <a:lstStyle/>
           <a:p>
             <a:pPr indent="0" marL="0">
               <a:buNone/>
             </a:pPr>
             <a:r>
-              <a:rPr lang="en-US" sz="900" b="1" spc="120" kern="0" dirty="0">
+              <a:rPr lang="en-US" sz="850" b="1" spc="100" kern="0" dirty="0">
                 <a:solidFill>
                   <a:srgbClr val="6E7689"/>
                 </a:solidFill>
@@ -6472,7 +6474,7 @@
               </a:rPr>
               <a:t>COVERAGE FOR A SMALL ENTERPRISE</a:t>
             </a:r>
-            <a:endParaRPr lang="en-US" sz="900" dirty="0"/>
+            <a:endParaRPr lang="en-US" sz="850" dirty="0"/>
           </a:p>
         </p:txBody>
       </p:sp>
@@ -6484,7 +6486,7 @@
         </p:nvSpPr>
         <p:spPr>
           <a:xfrm>
-            <a:off x="4508906" y="1993392"/>
+            <a:off x="4508906" y="1907032"/>
             <a:ext cx="3173882" cy="457200"/>
           </a:xfrm>
           <a:prstGeom prst="rect">
@@ -6494,7 +6496,9 @@
           <a:ln/>
         </p:spPr>
         <p:txBody>
-          <a:bodyPr wrap="square" lIns="0" tIns="0" rIns="0" bIns="0" rtlCol="0" anchor="t"/>
+          <a:bodyPr wrap="square" lIns="0" tIns="0" rIns="0" bIns="0" rtlCol="0" anchor="t">
+            <a:normAutofit/>
+          </a:bodyPr>
           <a:lstStyle/>
           <a:p>
             <a:pPr indent="0" marL="0">
@@ -6523,8 +6527,8 @@
         </p:nvSpPr>
         <p:spPr>
           <a:xfrm>
-            <a:off x="4508906" y="2468880"/>
-            <a:ext cx="3173882" cy="384048"/>
+            <a:off x="4508906" y="2382520"/>
+            <a:ext cx="3173882" cy="310896"/>
           </a:xfrm>
           <a:prstGeom prst="rect">
             <a:avLst/>
@@ -6565,12 +6569,12 @@
         </p:nvSpPr>
         <p:spPr>
           <a:xfrm>
-            <a:off x="8085125" y="1627632"/>
-            <a:ext cx="3539642" cy="1298448"/>
+            <a:off x="8085125" y="1541272"/>
+            <a:ext cx="3539642" cy="1225296"/>
           </a:xfrm>
           <a:prstGeom prst="roundRect">
             <a:avLst>
-              <a:gd name="adj" fmla="val 4225"/>
+              <a:gd name="adj" fmla="val 4478"/>
             </a:avLst>
           </a:prstGeom>
           <a:solidFill>
@@ -6592,8 +6596,8 @@
         </p:nvSpPr>
         <p:spPr>
           <a:xfrm>
-            <a:off x="8268005" y="1764792"/>
-            <a:ext cx="3173882" cy="219456"/>
+            <a:off x="8268005" y="1660144"/>
+            <a:ext cx="3173882" cy="237744"/>
           </a:xfrm>
           <a:prstGeom prst="rect">
             <a:avLst/>
@@ -6602,14 +6606,14 @@
           <a:ln/>
         </p:spPr>
         <p:txBody>
-          <a:bodyPr wrap="square" lIns="0" tIns="0" rIns="0" bIns="0" rtlCol="0" anchor="ctr"/>
+          <a:bodyPr wrap="square" lIns="0" tIns="0" rIns="0" bIns="0" rtlCol="0" anchor="t"/>
           <a:lstStyle/>
           <a:p>
             <a:pPr indent="0" marL="0">
               <a:buNone/>
             </a:pPr>
             <a:r>
-              <a:rPr lang="en-US" sz="900" b="1" spc="120" kern="0" dirty="0">
+              <a:rPr lang="en-US" sz="850" b="1" spc="100" kern="0" dirty="0">
                 <a:solidFill>
                   <a:srgbClr val="6E7689"/>
                 </a:solidFill>
@@ -6619,7 +6623,7 @@
               </a:rPr>
               <a:t>COLLATERAL REQUIRED</a:t>
             </a:r>
-            <a:endParaRPr lang="en-US" sz="900" dirty="0"/>
+            <a:endParaRPr lang="en-US" sz="850" dirty="0"/>
           </a:p>
         </p:txBody>
       </p:sp>
@@ -6631,7 +6635,7 @@
         </p:nvSpPr>
         <p:spPr>
           <a:xfrm>
-            <a:off x="8268005" y="1993392"/>
+            <a:off x="8268005" y="1907032"/>
             <a:ext cx="3173882" cy="457200"/>
           </a:xfrm>
           <a:prstGeom prst="rect">
@@ -6641,7 +6645,9 @@
           <a:ln/>
         </p:spPr>
         <p:txBody>
-          <a:bodyPr wrap="square" lIns="0" tIns="0" rIns="0" bIns="0" rtlCol="0" anchor="t"/>
+          <a:bodyPr wrap="square" lIns="0" tIns="0" rIns="0" bIns="0" rtlCol="0" anchor="t">
+            <a:normAutofit/>
+          </a:bodyPr>
           <a:lstStyle/>
           <a:p>
             <a:pPr indent="0" marL="0">
@@ -6670,8 +6676,8 @@
         </p:nvSpPr>
         <p:spPr>
           <a:xfrm>
-            <a:off x="8268005" y="2468880"/>
-            <a:ext cx="3173882" cy="384048"/>
+            <a:off x="8268005" y="2382520"/>
+            <a:ext cx="3173882" cy="310896"/>
           </a:xfrm>
           <a:prstGeom prst="rect">
             <a:avLst/>
@@ -6719,7 +6725,7 @@
           </p:nvPr>
         </p:nvGraphicFramePr>
         <p:xfrm>
-          <a:off x="566928" y="3163824"/>
+          <a:off x="566928" y="3004312"/>
           <a:ext cx="11057839" cy="914400"/>
         </p:xfrm>
         <a:graphic>
@@ -6730,7 +6736,7 @@
                 <a:gridCol w="2651760"/>
                 <a:gridCol w="8406079"/>
               </a:tblGrid>
-              <a:tr h="384048">
+              <a:tr h="347472">
                 <a:tc>
                   <a:txBody>
                     <a:bodyPr/>
@@ -6868,7 +6874,7 @@
                   </a:tcPr>
                 </a:tc>
               </a:tr>
-              <a:tr h="384048">
+              <a:tr h="347472">
                 <a:tc>
                   <a:txBody>
                     <a:bodyPr/>
@@ -7006,7 +7012,7 @@
                   </a:tcPr>
                 </a:tc>
               </a:tr>
-              <a:tr h="384048">
+              <a:tr h="347472">
                 <a:tc>
                   <a:txBody>
                     <a:bodyPr/>
@@ -7092,7 +7098,7 @@
                           <a:ea typeface="Calibri" pitchFamily="34" charset="-122"/>
                           <a:cs typeface="Calibri" pitchFamily="34" charset="-120"/>
                         </a:rPr>
-                        <a:t>Per borrower, aggregated across all member lending institutions — four sanctions from four banks still share one ceiling</a:t>
+                        <a:t>Per borrower, across all member lending institutions — four sanctions from four banks still share one ceiling</a:t>
                       </a:r>
                       <a:endParaRPr lang="en-US" sz="1050" dirty="0">
                         <a:latin typeface="Calibri" charset="0"/>
@@ -7144,7 +7150,7 @@
                   </a:tcPr>
                 </a:tc>
               </a:tr>
-              <a:tr h="384048">
+              <a:tr h="347472">
                 <a:tc>
                   <a:txBody>
                     <a:bodyPr/>
@@ -7230,7 +7236,7 @@
                           <a:ea typeface="Calibri" pitchFamily="34" charset="-122"/>
                           <a:cs typeface="Calibri" pitchFamily="34" charset="-120"/>
                         </a:rPr>
-                        <a:t>Permitted. Collateral may be taken on part of a facility with the remainder guaranteed — the route for exposure above the ceiling</a:t>
+                        <a:t>Permitted — collateral on part of a facility with the remainder guaranteed. The route for exposure above the ceiling</a:t>
                       </a:r>
                       <a:endParaRPr lang="en-US" sz="1050" dirty="0">
                         <a:latin typeface="Calibri" charset="0"/>
@@ -7282,7 +7288,7 @@
                   </a:tcPr>
                 </a:tc>
               </a:tr>
-              <a:tr h="384048">
+              <a:tr h="347472">
                 <a:tc>
                   <a:txBody>
                     <a:bodyPr/>
@@ -7420,7 +7426,7 @@
                   </a:tcPr>
                 </a:tc>
               </a:tr>
-              <a:tr h="384048">
+              <a:tr h="347472">
                 <a:tc>
                   <a:txBody>
                     <a:bodyPr/>
@@ -7506,145 +7512,7 @@
                           <a:ea typeface="Calibri" pitchFamily="34" charset="-122"/>
                           <a:cs typeface="Calibri" pitchFamily="34" charset="-120"/>
                         </a:rPr>
-                        <a:t>On the sanctioned amount in year 1; on the outstanding thereafter — which is why an over-sanctioned, undrawn limit is expensive</a:t>
-                      </a:r>
-                      <a:endParaRPr lang="en-US" sz="1050" dirty="0">
-                        <a:latin typeface="Calibri" charset="0"/>
-                        <a:ea typeface="Calibri" charset="0"/>
-                        <a:cs typeface="Calibri" charset="0"/>
-                      </a:endParaRPr>
-                    </a:p>
-                  </a:txBody>
-                  <a:tcPr marL="0" marR="76200" marT="63500" marB="63500" anchor="ctr">
-                    <a:lnL w="0" cap="flat" cmpd="sng" algn="ctr">
-                      <a:solidFill>
-                        <a:srgbClr val="666666"/>
-                      </a:solidFill>
-                      <a:prstDash val="solid"/>
-                      <a:round/>
-                      <a:headEnd type="none" w="med" len="med"/>
-                      <a:tailEnd type="none" w="med" len="med"/>
-                    </a:lnL>
-                    <a:lnR w="0" cap="flat" cmpd="sng" algn="ctr">
-                      <a:solidFill>
-                        <a:srgbClr val="666666"/>
-                      </a:solidFill>
-                      <a:prstDash val="solid"/>
-                      <a:round/>
-                      <a:headEnd type="none" w="med" len="med"/>
-                      <a:tailEnd type="none" w="med" len="med"/>
-                    </a:lnR>
-                    <a:lnT w="0" cap="flat" cmpd="sng" algn="ctr">
-                      <a:solidFill>
-                        <a:srgbClr val="666666"/>
-                      </a:solidFill>
-                      <a:prstDash val="solid"/>
-                      <a:round/>
-                      <a:headEnd type="none" w="med" len="med"/>
-                      <a:tailEnd type="none" w="med" len="med"/>
-                    </a:lnT>
-                    <a:lnB w="7620" cap="flat" cmpd="sng" algn="ctr">
-                      <a:solidFill>
-                        <a:srgbClr val="E2E4EA"/>
-                      </a:solidFill>
-                      <a:prstDash val="solid"/>
-                      <a:round/>
-                      <a:headEnd type="none" w="med" len="med"/>
-                      <a:tailEnd type="none" w="med" len="med"/>
-                    </a:lnB>
-                    <a:solidFill>
-                      <a:srgbClr val="FFFFFF"/>
-                    </a:solidFill>
-                  </a:tcPr>
-                </a:tc>
-              </a:tr>
-              <a:tr h="384048">
-                <a:tc>
-                  <a:txBody>
-                    <a:bodyPr/>
-                    <a:lstStyle/>
-                    <a:p>
-                      <a:pPr algn="l" indent="0" marL="0">
-                        <a:buNone/>
-                      </a:pPr>
-                      <a:r>
-                        <a:rPr lang="en-US" sz="1050" dirty="0">
-                          <a:solidFill>
-                            <a:srgbClr val="3B4660"/>
-                          </a:solidFill>
-                          <a:latin typeface="Calibri" pitchFamily="34" charset="0"/>
-                          <a:ea typeface="Calibri" pitchFamily="34" charset="-122"/>
-                          <a:cs typeface="Calibri" pitchFamily="34" charset="-120"/>
-                        </a:rPr>
-                        <a:t>Fee concession</a:t>
-                      </a:r>
-                      <a:endParaRPr lang="en-US" sz="1050" dirty="0">
-                        <a:latin typeface="Calibri" charset="0"/>
-                        <a:ea typeface="Calibri" charset="0"/>
-                        <a:cs typeface="Calibri" charset="0"/>
-                      </a:endParaRPr>
-                    </a:p>
-                  </a:txBody>
-                  <a:tcPr marL="0" marR="76200" marT="63500" marB="63500" anchor="ctr">
-                    <a:lnL w="0" cap="flat" cmpd="sng" algn="ctr">
-                      <a:solidFill>
-                        <a:srgbClr val="666666"/>
-                      </a:solidFill>
-                      <a:prstDash val="solid"/>
-                      <a:round/>
-                      <a:headEnd type="none" w="med" len="med"/>
-                      <a:tailEnd type="none" w="med" len="med"/>
-                    </a:lnL>
-                    <a:lnR w="0" cap="flat" cmpd="sng" algn="ctr">
-                      <a:solidFill>
-                        <a:srgbClr val="666666"/>
-                      </a:solidFill>
-                      <a:prstDash val="solid"/>
-                      <a:round/>
-                      <a:headEnd type="none" w="med" len="med"/>
-                      <a:tailEnd type="none" w="med" len="med"/>
-                    </a:lnR>
-                    <a:lnT w="0" cap="flat" cmpd="sng" algn="ctr">
-                      <a:solidFill>
-                        <a:srgbClr val="666666"/>
-                      </a:solidFill>
-                      <a:prstDash val="solid"/>
-                      <a:round/>
-                      <a:headEnd type="none" w="med" len="med"/>
-                      <a:tailEnd type="none" w="med" len="med"/>
-                    </a:lnT>
-                    <a:lnB w="7620" cap="flat" cmpd="sng" algn="ctr">
-                      <a:solidFill>
-                        <a:srgbClr val="E2E4EA"/>
-                      </a:solidFill>
-                      <a:prstDash val="solid"/>
-                      <a:round/>
-                      <a:headEnd type="none" w="med" len="med"/>
-                      <a:tailEnd type="none" w="med" len="med"/>
-                    </a:lnB>
-                    <a:solidFill>
-                      <a:srgbClr val="FFFFFF"/>
-                    </a:solidFill>
-                  </a:tcPr>
-                </a:tc>
-                <a:tc>
-                  <a:txBody>
-                    <a:bodyPr/>
-                    <a:lstStyle/>
-                    <a:p>
-                      <a:pPr algn="r" indent="0" marL="0">
-                        <a:buNone/>
-                      </a:pPr>
-                      <a:r>
-                        <a:rPr lang="en-US" sz="1050" dirty="0">
-                          <a:solidFill>
-                            <a:srgbClr val="3B4660"/>
-                          </a:solidFill>
-                          <a:latin typeface="Calibri" pitchFamily="34" charset="0"/>
-                          <a:ea typeface="Calibri" pitchFamily="34" charset="-122"/>
-                          <a:cs typeface="Calibri" pitchFamily="34" charset="-120"/>
-                        </a:rPr>
-                        <a:t>10% for women, SC/ST, differently-abled, Agniveer and transgender borrowers, and for NER, J&amp;K, Aspirational District or ZED units</a:t>
+                        <a:t>On the sanctioned amount in year 1; on the outstanding thereafter — an over-sanctioned, undrawn limit is expensive</a:t>
                       </a:r>
                       <a:endParaRPr lang="en-US" sz="1050" dirty="0">
                         <a:latin typeface="Calibri" charset="0"/>
@@ -7708,12 +7576,12 @@
         </p:nvSpPr>
         <p:spPr>
           <a:xfrm>
-            <a:off x="566928" y="6016752"/>
-            <a:ext cx="11057839" cy="731520"/>
+            <a:off x="566928" y="5253736"/>
+            <a:ext cx="11057839" cy="1098885"/>
           </a:xfrm>
           <a:prstGeom prst="roundRect">
             <a:avLst>
-              <a:gd name="adj" fmla="val 6250"/>
+              <a:gd name="adj" fmla="val 4161"/>
             </a:avLst>
           </a:prstGeom>
           <a:solidFill>
@@ -7735,8 +7603,8 @@
         </p:nvSpPr>
         <p:spPr>
           <a:xfrm>
-            <a:off x="804672" y="6163056"/>
-            <a:ext cx="2743200" cy="201168"/>
+            <a:off x="804672" y="5363464"/>
+            <a:ext cx="2743200" cy="182880"/>
           </a:xfrm>
           <a:prstGeom prst="rect">
             <a:avLst/>
@@ -7774,8 +7642,8 @@
         </p:nvSpPr>
         <p:spPr>
           <a:xfrm>
-            <a:off x="804672" y="6364224"/>
-            <a:ext cx="10582351" cy="232220"/>
+            <a:off x="804672" y="5546344"/>
+            <a:ext cx="10582351" cy="212649"/>
           </a:xfrm>
           <a:prstGeom prst="rect">
             <a:avLst/>
@@ -7789,12 +7657,12 @@
           <a:p>
             <a:pPr indent="0" marL="0">
               <a:lnSpc>
-                <a:spcPts val="1725"/>
+                <a:spcPts val="1610"/>
               </a:lnSpc>
               <a:buNone/>
             </a:pPr>
             <a:r>
-              <a:rPr lang="en-US" sz="1500" b="1" dirty="0">
+              <a:rPr lang="en-US" sz="1400" b="1" dirty="0">
                 <a:solidFill>
                   <a:srgbClr val="0A1426"/>
                 </a:solidFill>
@@ -7804,7 +7672,7 @@
               </a:rPr>
               <a:t>Verify before you apply, not after</a:t>
             </a:r>
-            <a:endParaRPr lang="en-US" sz="1500" dirty="0"/>
+            <a:endParaRPr lang="en-US" sz="1400" dirty="0"/>
           </a:p>
         </p:txBody>
       </p:sp>
@@ -7816,8 +7684,8 @@
         </p:nvSpPr>
         <p:spPr>
           <a:xfrm>
-            <a:off x="804672" y="6669596"/>
-            <a:ext cx="10582351" cy="182880"/>
+            <a:off x="804672" y="5813857"/>
+            <a:ext cx="10582351" cy="465612"/>
           </a:xfrm>
           <a:prstGeom prst="rect">
             <a:avLst/>
@@ -7831,12 +7699,12 @@
           <a:p>
             <a:pPr indent="0" marL="0">
               <a:lnSpc>
-                <a:spcPts val="1207"/>
+                <a:spcPts val="1278"/>
               </a:lnSpc>
               <a:buNone/>
             </a:pPr>
             <a:r>
-              <a:rPr lang="en-US" sz="850" dirty="0">
+              <a:rPr lang="en-US" sz="900" dirty="0">
                 <a:solidFill>
                   <a:srgbClr val="3B4660"/>
                 </a:solidFill>
@@ -7844,9 +7712,9 @@
                 <a:ea typeface="Calibri" pitchFamily="34" charset="-122"/>
                 <a:cs typeface="Calibri" pitchFamily="34" charset="-120"/>
               </a:rPr>
-              <a:t>CGTMSE parameters are revised by circular and vary between member lending institutions. These reflect the position published after the April 2025 revisions, checked against public sources in August 2026. Confirm the current operative circular and the fee applicable to the specific bank with the lender before relying on any number here.</a:t>
+              <a:t>CGTMSE parameters are revised by circular and vary between lending institutions. These reflect the April 2025 revisions, checked against public sources in August 2026. Confirm the operative circular with the lender before relying on any number here.</a:t>
             </a:r>
-            <a:endParaRPr lang="en-US" sz="850" dirty="0"/>
+            <a:endParaRPr lang="en-US" sz="900" dirty="0"/>
           </a:p>
         </p:txBody>
       </p:sp>
@@ -8027,8 +7895,8 @@
         </p:nvSpPr>
         <p:spPr>
           <a:xfrm>
-            <a:off x="566928" y="1005840"/>
-            <a:ext cx="11057839" cy="512064"/>
+            <a:off x="566928" y="950976"/>
+            <a:ext cx="11057839" cy="462280"/>
           </a:xfrm>
           <a:prstGeom prst="rect">
             <a:avLst/>
@@ -8042,12 +7910,12 @@
           <a:p>
             <a:pPr indent="0" marL="0">
               <a:lnSpc>
-                <a:spcPts val="1900"/>
+                <a:spcPts val="1750"/>
               </a:lnSpc>
               <a:buNone/>
             </a:pPr>
             <a:r>
-              <a:rPr lang="en-US" sz="1350" dirty="0">
+              <a:rPr lang="en-US" sz="1250" dirty="0">
                 <a:solidFill>
                   <a:srgbClr val="3B4660"/>
                 </a:solidFill>
@@ -8057,7 +7925,7 @@
               </a:rPr>
               <a:t>The single most important structural fact in the pack, and easy to miss: the ₹10 crore ceiling is per borrower — not per project, per facility or per lender.</a:t>
             </a:r>
-            <a:endParaRPr lang="en-US" sz="1350" dirty="0"/>
+            <a:endParaRPr lang="en-US" sz="1250" dirty="0"/>
           </a:p>
         </p:txBody>
       </p:sp>
@@ -8068,8 +7936,8 @@
           <p:nvPr/>
         </p:nvGraphicFramePr>
         <p:xfrm>
-          <a:off x="566928" y="1627632"/>
-          <a:ext cx="11057839" cy="2377440"/>
+          <a:off x="566928" y="1541272"/>
+          <a:ext cx="11057839" cy="2057400"/>
         </p:xfrm>
         <a:graphic xmlns:a="http://schemas.openxmlformats.org/drawingml/2006/main">
           <a:graphicData uri="http://schemas.openxmlformats.org/drawingml/2006/chart">
@@ -8085,12 +7953,12 @@
         </p:nvSpPr>
         <p:spPr>
           <a:xfrm>
-            <a:off x="566928" y="4233672"/>
-            <a:ext cx="3539642" cy="1243584"/>
+            <a:off x="566928" y="3827272"/>
+            <a:ext cx="3539642" cy="1170432"/>
           </a:xfrm>
           <a:prstGeom prst="roundRect">
             <a:avLst>
-              <a:gd name="adj" fmla="val 4412"/>
+              <a:gd name="adj" fmla="val 4688"/>
             </a:avLst>
           </a:prstGeom>
           <a:solidFill>
@@ -8112,8 +7980,8 @@
         </p:nvSpPr>
         <p:spPr>
           <a:xfrm>
-            <a:off x="749808" y="4370832"/>
-            <a:ext cx="3173882" cy="219456"/>
+            <a:off x="749808" y="3946144"/>
+            <a:ext cx="3173882" cy="237744"/>
           </a:xfrm>
           <a:prstGeom prst="rect">
             <a:avLst/>
@@ -8122,14 +7990,14 @@
           <a:ln/>
         </p:spPr>
         <p:txBody>
-          <a:bodyPr wrap="square" lIns="0" tIns="0" rIns="0" bIns="0" rtlCol="0" anchor="ctr"/>
+          <a:bodyPr wrap="square" lIns="0" tIns="0" rIns="0" bIns="0" rtlCol="0" anchor="t"/>
           <a:lstStyle/>
           <a:p>
             <a:pPr indent="0" marL="0">
               <a:buNone/>
             </a:pPr>
             <a:r>
-              <a:rPr lang="en-US" sz="900" b="1" spc="120" kern="0" dirty="0">
+              <a:rPr lang="en-US" sz="850" b="1" spc="100" kern="0" dirty="0">
                 <a:solidFill>
                   <a:srgbClr val="6E7689"/>
                 </a:solidFill>
@@ -8139,7 +8007,7 @@
               </a:rPr>
               <a:t>GROSS DEMAND</a:t>
             </a:r>
-            <a:endParaRPr lang="en-US" sz="900" dirty="0"/>
+            <a:endParaRPr lang="en-US" sz="850" dirty="0"/>
           </a:p>
         </p:txBody>
       </p:sp>
@@ -8151,7 +8019,7 @@
         </p:nvSpPr>
         <p:spPr>
           <a:xfrm>
-            <a:off x="749808" y="4599432"/>
+            <a:off x="749808" y="4193032"/>
             <a:ext cx="3173882" cy="457200"/>
           </a:xfrm>
           <a:prstGeom prst="rect">
@@ -8161,7 +8029,9 @@
           <a:ln/>
         </p:spPr>
         <p:txBody>
-          <a:bodyPr wrap="square" lIns="0" tIns="0" rIns="0" bIns="0" rtlCol="0" anchor="t"/>
+          <a:bodyPr wrap="square" lIns="0" tIns="0" rIns="0" bIns="0" rtlCol="0" anchor="t">
+            <a:normAutofit/>
+          </a:bodyPr>
           <a:lstStyle/>
           <a:p>
             <a:pPr indent="0" marL="0">
@@ -8190,8 +8060,8 @@
         </p:nvSpPr>
         <p:spPr>
           <a:xfrm>
-            <a:off x="749808" y="5074920"/>
-            <a:ext cx="3173882" cy="329184"/>
+            <a:off x="749808" y="4668520"/>
+            <a:ext cx="3173882" cy="256032"/>
           </a:xfrm>
           <a:prstGeom prst="rect">
             <a:avLst/>
@@ -8232,12 +8102,12 @@
         </p:nvSpPr>
         <p:spPr>
           <a:xfrm>
-            <a:off x="4326026" y="4233672"/>
-            <a:ext cx="3539642" cy="1243584"/>
+            <a:off x="4326026" y="3827272"/>
+            <a:ext cx="3539642" cy="1170432"/>
           </a:xfrm>
           <a:prstGeom prst="roundRect">
             <a:avLst>
-              <a:gd name="adj" fmla="val 4412"/>
+              <a:gd name="adj" fmla="val 4688"/>
             </a:avLst>
           </a:prstGeom>
           <a:solidFill>
@@ -8259,8 +8129,8 @@
         </p:nvSpPr>
         <p:spPr>
           <a:xfrm>
-            <a:off x="4508906" y="4370832"/>
-            <a:ext cx="3173882" cy="219456"/>
+            <a:off x="4508906" y="3946144"/>
+            <a:ext cx="3173882" cy="237744"/>
           </a:xfrm>
           <a:prstGeom prst="rect">
             <a:avLst/>
@@ -8269,14 +8139,14 @@
           <a:ln/>
         </p:spPr>
         <p:txBody>
-          <a:bodyPr wrap="square" lIns="0" tIns="0" rIns="0" bIns="0" rtlCol="0" anchor="ctr"/>
+          <a:bodyPr wrap="square" lIns="0" tIns="0" rIns="0" bIns="0" rtlCol="0" anchor="t"/>
           <a:lstStyle/>
           <a:p>
             <a:pPr indent="0" marL="0">
               <a:buNone/>
             </a:pPr>
             <a:r>
-              <a:rPr lang="en-US" sz="900" b="1" spc="120" kern="0" dirty="0">
+              <a:rPr lang="en-US" sz="850" b="1" spc="100" kern="0" dirty="0">
                 <a:solidFill>
                   <a:srgbClr val="6E7689"/>
                 </a:solidFill>
@@ -8286,7 +8156,7 @@
               </a:rPr>
               <a:t>CGTMSE CEILING</a:t>
             </a:r>
-            <a:endParaRPr lang="en-US" sz="900" dirty="0"/>
+            <a:endParaRPr lang="en-US" sz="850" dirty="0"/>
           </a:p>
         </p:txBody>
       </p:sp>
@@ -8298,7 +8168,7 @@
         </p:nvSpPr>
         <p:spPr>
           <a:xfrm>
-            <a:off x="4508906" y="4599432"/>
+            <a:off x="4508906" y="4193032"/>
             <a:ext cx="3173882" cy="457200"/>
           </a:xfrm>
           <a:prstGeom prst="rect">
@@ -8308,7 +8178,9 @@
           <a:ln/>
         </p:spPr>
         <p:txBody>
-          <a:bodyPr wrap="square" lIns="0" tIns="0" rIns="0" bIns="0" rtlCol="0" anchor="t"/>
+          <a:bodyPr wrap="square" lIns="0" tIns="0" rIns="0" bIns="0" rtlCol="0" anchor="t">
+            <a:normAutofit/>
+          </a:bodyPr>
           <a:lstStyle/>
           <a:p>
             <a:pPr indent="0" marL="0">
@@ -8337,8 +8209,8 @@
         </p:nvSpPr>
         <p:spPr>
           <a:xfrm>
-            <a:off x="4508906" y="5074920"/>
-            <a:ext cx="3173882" cy="329184"/>
+            <a:off x="4508906" y="4668520"/>
+            <a:ext cx="3173882" cy="256032"/>
           </a:xfrm>
           <a:prstGeom prst="rect">
             <a:avLst/>
@@ -8379,12 +8251,12 @@
         </p:nvSpPr>
         <p:spPr>
           <a:xfrm>
-            <a:off x="8085125" y="4233672"/>
-            <a:ext cx="3539642" cy="1243584"/>
+            <a:off x="8085125" y="3827272"/>
+            <a:ext cx="3539642" cy="1170432"/>
           </a:xfrm>
           <a:prstGeom prst="roundRect">
             <a:avLst>
-              <a:gd name="adj" fmla="val 4412"/>
+              <a:gd name="adj" fmla="val 4688"/>
             </a:avLst>
           </a:prstGeom>
           <a:solidFill>
@@ -8406,8 +8278,8 @@
         </p:nvSpPr>
         <p:spPr>
           <a:xfrm>
-            <a:off x="8268005" y="4370832"/>
-            <a:ext cx="3173882" cy="219456"/>
+            <a:off x="8268005" y="3946144"/>
+            <a:ext cx="3173882" cy="237744"/>
           </a:xfrm>
           <a:prstGeom prst="rect">
             <a:avLst/>
@@ -8416,14 +8288,14 @@
           <a:ln/>
         </p:spPr>
         <p:txBody>
-          <a:bodyPr wrap="square" lIns="0" tIns="0" rIns="0" bIns="0" rtlCol="0" anchor="ctr"/>
+          <a:bodyPr wrap="square" lIns="0" tIns="0" rIns="0" bIns="0" rtlCol="0" anchor="t"/>
           <a:lstStyle/>
           <a:p>
             <a:pPr indent="0" marL="0">
               <a:buNone/>
             </a:pPr>
             <a:r>
-              <a:rPr lang="en-US" sz="900" b="1" spc="120" kern="0" dirty="0">
+              <a:rPr lang="en-US" sz="850" b="1" spc="100" kern="0" dirty="0">
                 <a:solidFill>
                   <a:srgbClr val="6E7689"/>
                 </a:solidFill>
@@ -8433,7 +8305,7 @@
               </a:rPr>
               <a:t>TO FUND ANOTHER WAY</a:t>
             </a:r>
-            <a:endParaRPr lang="en-US" sz="900" dirty="0"/>
+            <a:endParaRPr lang="en-US" sz="850" dirty="0"/>
           </a:p>
         </p:txBody>
       </p:sp>
@@ -8445,7 +8317,7 @@
         </p:nvSpPr>
         <p:spPr>
           <a:xfrm>
-            <a:off x="8268005" y="4599432"/>
+            <a:off x="8268005" y="4193032"/>
             <a:ext cx="3173882" cy="457200"/>
           </a:xfrm>
           <a:prstGeom prst="rect">
@@ -8455,7 +8327,9 @@
           <a:ln/>
         </p:spPr>
         <p:txBody>
-          <a:bodyPr wrap="square" lIns="0" tIns="0" rIns="0" bIns="0" rtlCol="0" anchor="t"/>
+          <a:bodyPr wrap="square" lIns="0" tIns="0" rIns="0" bIns="0" rtlCol="0" anchor="t">
+            <a:normAutofit/>
+          </a:bodyPr>
           <a:lstStyle/>
           <a:p>
             <a:pPr indent="0" marL="0">
@@ -8484,8 +8358,8 @@
         </p:nvSpPr>
         <p:spPr>
           <a:xfrm>
-            <a:off x="8268005" y="5074920"/>
-            <a:ext cx="3173882" cy="329184"/>
+            <a:off x="8268005" y="4668520"/>
+            <a:ext cx="3173882" cy="256032"/>
           </a:xfrm>
           <a:prstGeom prst="rect">
             <a:avLst/>
@@ -8526,12 +8400,12 @@
         </p:nvSpPr>
         <p:spPr>
           <a:xfrm>
-            <a:off x="566928" y="5733288"/>
-            <a:ext cx="11057839" cy="731520"/>
+            <a:off x="566928" y="5253736"/>
+            <a:ext cx="11057839" cy="1098885"/>
           </a:xfrm>
           <a:prstGeom prst="roundRect">
             <a:avLst>
-              <a:gd name="adj" fmla="val 6250"/>
+              <a:gd name="adj" fmla="val 4161"/>
             </a:avLst>
           </a:prstGeom>
           <a:solidFill>
@@ -8553,8 +8427,8 @@
         </p:nvSpPr>
         <p:spPr>
           <a:xfrm>
-            <a:off x="804672" y="5879592"/>
-            <a:ext cx="2743200" cy="201168"/>
+            <a:off x="804672" y="5363464"/>
+            <a:ext cx="2743200" cy="182880"/>
           </a:xfrm>
           <a:prstGeom prst="rect">
             <a:avLst/>
@@ -8592,8 +8466,8 @@
         </p:nvSpPr>
         <p:spPr>
           <a:xfrm>
-            <a:off x="804672" y="6080760"/>
-            <a:ext cx="10582351" cy="232220"/>
+            <a:off x="804672" y="5546344"/>
+            <a:ext cx="10582351" cy="212649"/>
           </a:xfrm>
           <a:prstGeom prst="rect">
             <a:avLst/>
@@ -8607,12 +8481,12 @@
           <a:p>
             <a:pPr indent="0" marL="0">
               <a:lnSpc>
-                <a:spcPts val="1725"/>
+                <a:spcPts val="1610"/>
               </a:lnSpc>
               <a:buNone/>
             </a:pPr>
             <a:r>
-              <a:rPr lang="en-US" sz="1500" b="1" dirty="0">
+              <a:rPr lang="en-US" sz="1400" b="1" dirty="0">
                 <a:solidFill>
                   <a:srgbClr val="0A1426"/>
                 </a:solidFill>
@@ -8622,7 +8496,7 @@
               </a:rPr>
               <a:t>Routes for the residual</a:t>
             </a:r>
-            <a:endParaRPr lang="en-US" sz="1500" dirty="0"/>
+            <a:endParaRPr lang="en-US" sz="1400" dirty="0"/>
           </a:p>
         </p:txBody>
       </p:sp>
@@ -8634,8 +8508,8 @@
         </p:nvSpPr>
         <p:spPr>
           <a:xfrm>
-            <a:off x="804672" y="6386132"/>
-            <a:ext cx="10582351" cy="182880"/>
+            <a:off x="804672" y="5813857"/>
+            <a:ext cx="10582351" cy="465612"/>
           </a:xfrm>
           <a:prstGeom prst="rect">
             <a:avLst/>
@@ -8649,12 +8523,12 @@
           <a:p>
             <a:pPr indent="0" marL="0">
               <a:lnSpc>
-                <a:spcPts val="1207"/>
+                <a:spcPts val="1278"/>
               </a:lnSpc>
               <a:buNone/>
             </a:pPr>
             <a:r>
-              <a:rPr lang="en-US" sz="850" dirty="0">
+              <a:rPr lang="en-US" sz="900" dirty="0">
                 <a:solidFill>
                   <a:srgbClr val="3B4660"/>
                 </a:solidFill>
@@ -8662,9 +8536,9 @@
                 <a:ea typeface="Calibri" pitchFamily="34" charset="-122"/>
                 <a:cs typeface="Calibri" pitchFamily="34" charset="-120"/>
               </a:rPr>
-              <a:t>Hybrid security is preferred — CGTMSE expressly permits collateral on part of a facility with the balance guaranteed, needing no new entity and no consent. The company-level round covers the rest, which is precisely the ₹6–8 crore the company deck arrives at. Separate SPVs are legally available but practically difficult: a new entity has no turnover history and fails the eligibility tests in both RFPs, and Ramayan Vatika's lock-in bars restructuring without BDA's consent.</a:t>
+              <a:t>Hybrid security is preferred — CGTMSE permits collateral on part of a facility with the balance guaranteed, needing no new entity and no consent. The company-level round covers the rest. Separate SPVs are legally available but fail the eligibility tests in both RFPs.</a:t>
             </a:r>
-            <a:endParaRPr lang="en-US" sz="850" dirty="0"/>
+            <a:endParaRPr lang="en-US" sz="900" dirty="0"/>
           </a:p>
         </p:txBody>
       </p:sp>
@@ -9680,8 +9554,8 @@
         </p:nvSpPr>
         <p:spPr>
           <a:xfrm>
-            <a:off x="566928" y="1005840"/>
-            <a:ext cx="11057839" cy="512064"/>
+            <a:off x="566928" y="950976"/>
+            <a:ext cx="11057839" cy="462280"/>
           </a:xfrm>
           <a:prstGeom prst="rect">
             <a:avLst/>
@@ -9695,12 +9569,12 @@
           <a:p>
             <a:pPr indent="0" marL="0">
               <a:lnSpc>
-                <a:spcPts val="1900"/>
+                <a:spcPts val="1750"/>
               </a:lnSpc>
               <a:buNone/>
             </a:pPr>
             <a:r>
-              <a:rPr lang="en-US" sz="1350" dirty="0">
+              <a:rPr lang="en-US" sz="1250" dirty="0">
                 <a:solidFill>
                   <a:srgbClr val="3B4660"/>
                 </a:solidFill>
@@ -9710,7 +9584,7 @@
               </a:rPr>
               <a:t>These decks are a model, not a due-diligence report. Everything below is unknown, inconsistent in the source documents, or dependent on a third party — and each moves numbers.</a:t>
             </a:r>
-            <a:endParaRPr lang="en-US" sz="1350" dirty="0"/>
+            <a:endParaRPr lang="en-US" sz="1250" dirty="0"/>
           </a:p>
         </p:txBody>
       </p:sp>
@@ -9722,7 +9596,7 @@
         </p:nvSpPr>
         <p:spPr>
           <a:xfrm>
-            <a:off x="566928" y="1664208"/>
+            <a:off x="566928" y="1577848"/>
             <a:ext cx="182880" cy="182880"/>
           </a:xfrm>
           <a:prstGeom prst="ellipse">
@@ -9742,7 +9616,7 @@
         </p:nvSpPr>
         <p:spPr>
           <a:xfrm>
-            <a:off x="859536" y="1627632"/>
+            <a:off x="859536" y="1541272"/>
             <a:ext cx="5053432" cy="237744"/>
           </a:xfrm>
           <a:prstGeom prst="rect">
@@ -9781,7 +9655,7 @@
         </p:nvSpPr>
         <p:spPr>
           <a:xfrm>
-            <a:off x="859536" y="1874520"/>
+            <a:off x="859536" y="1788160"/>
             <a:ext cx="5053432" cy="859536"/>
           </a:xfrm>
           <a:prstGeom prst="rect">
@@ -9823,7 +9697,7 @@
         </p:nvSpPr>
         <p:spPr>
           <a:xfrm>
-            <a:off x="566928" y="2816352"/>
+            <a:off x="566928" y="2729992"/>
             <a:ext cx="182880" cy="182880"/>
           </a:xfrm>
           <a:prstGeom prst="ellipse">
@@ -9843,7 +9717,7 @@
         </p:nvSpPr>
         <p:spPr>
           <a:xfrm>
-            <a:off x="859536" y="2779776"/>
+            <a:off x="859536" y="2693416"/>
             <a:ext cx="5053432" cy="237744"/>
           </a:xfrm>
           <a:prstGeom prst="rect">
@@ -9882,7 +9756,7 @@
         </p:nvSpPr>
         <p:spPr>
           <a:xfrm>
-            <a:off x="859536" y="3026664"/>
+            <a:off x="859536" y="2940304"/>
             <a:ext cx="5053432" cy="859536"/>
           </a:xfrm>
           <a:prstGeom prst="rect">
@@ -9924,7 +9798,7 @@
         </p:nvSpPr>
         <p:spPr>
           <a:xfrm>
-            <a:off x="566928" y="3968496"/>
+            <a:off x="566928" y="3882136"/>
             <a:ext cx="182880" cy="182880"/>
           </a:xfrm>
           <a:prstGeom prst="ellipse">
@@ -9944,7 +9818,7 @@
         </p:nvSpPr>
         <p:spPr>
           <a:xfrm>
-            <a:off x="859536" y="3931920"/>
+            <a:off x="859536" y="3845560"/>
             <a:ext cx="5053432" cy="237744"/>
           </a:xfrm>
           <a:prstGeom prst="rect">
@@ -9983,7 +9857,7 @@
         </p:nvSpPr>
         <p:spPr>
           <a:xfrm>
-            <a:off x="859536" y="4178808"/>
+            <a:off x="859536" y="4092448"/>
             <a:ext cx="5053432" cy="859536"/>
           </a:xfrm>
           <a:prstGeom prst="rect">
@@ -10025,7 +9899,7 @@
         </p:nvSpPr>
         <p:spPr>
           <a:xfrm>
-            <a:off x="6278728" y="1664208"/>
+            <a:off x="6278728" y="1577848"/>
             <a:ext cx="182880" cy="182880"/>
           </a:xfrm>
           <a:prstGeom prst="ellipse">
@@ -10045,7 +9919,7 @@
         </p:nvSpPr>
         <p:spPr>
           <a:xfrm>
-            <a:off x="6571336" y="1627632"/>
+            <a:off x="6571336" y="1541272"/>
             <a:ext cx="5053432" cy="237744"/>
           </a:xfrm>
           <a:prstGeom prst="rect">
@@ -10084,7 +9958,7 @@
         </p:nvSpPr>
         <p:spPr>
           <a:xfrm>
-            <a:off x="6571336" y="1874520"/>
+            <a:off x="6571336" y="1788160"/>
             <a:ext cx="5053432" cy="859536"/>
           </a:xfrm>
           <a:prstGeom prst="rect">
@@ -10126,7 +10000,7 @@
         </p:nvSpPr>
         <p:spPr>
           <a:xfrm>
-            <a:off x="6278728" y="2816352"/>
+            <a:off x="6278728" y="2729992"/>
             <a:ext cx="182880" cy="182880"/>
           </a:xfrm>
           <a:prstGeom prst="ellipse">
@@ -10146,7 +10020,7 @@
         </p:nvSpPr>
         <p:spPr>
           <a:xfrm>
-            <a:off x="6571336" y="2779776"/>
+            <a:off x="6571336" y="2693416"/>
             <a:ext cx="5053432" cy="237744"/>
           </a:xfrm>
           <a:prstGeom prst="rect">
@@ -10185,7 +10059,7 @@
         </p:nvSpPr>
         <p:spPr>
           <a:xfrm>
-            <a:off x="6571336" y="3026664"/>
+            <a:off x="6571336" y="2940304"/>
             <a:ext cx="5053432" cy="859536"/>
           </a:xfrm>
           <a:prstGeom prst="rect">
@@ -10227,7 +10101,7 @@
         </p:nvSpPr>
         <p:spPr>
           <a:xfrm>
-            <a:off x="6278728" y="3968496"/>
+            <a:off x="6278728" y="3882136"/>
             <a:ext cx="182880" cy="182880"/>
           </a:xfrm>
           <a:prstGeom prst="ellipse">
@@ -10247,7 +10121,7 @@
         </p:nvSpPr>
         <p:spPr>
           <a:xfrm>
-            <a:off x="6571336" y="3931920"/>
+            <a:off x="6571336" y="3845560"/>
             <a:ext cx="5053432" cy="237744"/>
           </a:xfrm>
           <a:prstGeom prst="rect">
@@ -10286,7 +10160,7 @@
         </p:nvSpPr>
         <p:spPr>
           <a:xfrm>
-            <a:off x="6571336" y="4178808"/>
+            <a:off x="6571336" y="4092448"/>
             <a:ext cx="5053432" cy="859536"/>
           </a:xfrm>
           <a:prstGeom prst="rect">

--- a/pptx/EOD-Project-Finance-Portfolio.pptx
+++ b/pptx/EOD-Project-Finance-Portfolio.pptx
@@ -202,7 +202,7 @@
                 <c:formatCode>General</c:formatCode>
                 <c:ptCount val="4"/>
                 <c:pt idx="0">
-                  <c:v>3.37</c:v>
+                  <c:v>1</c:v>
                 </c:pt>
                 <c:pt idx="1">
                   <c:v>4.17</c:v>
@@ -2013,7 +2013,7 @@
                 <a:ea typeface="Calibri" pitchFamily="34" charset="-122"/>
                 <a:cs typeface="Calibri" pitchFamily="34" charset="-120"/>
               </a:rPr>
-              <a:t>₹11.5 Cr</a:t>
+              <a:t>₹9.2 Cr</a:t>
             </a:r>
             <a:endParaRPr lang="en-US" sz="2900" dirty="0"/>
           </a:p>
@@ -2133,7 +2133,7 @@
                 <a:ea typeface="Calibri" pitchFamily="34" charset="-122"/>
                 <a:cs typeface="Calibri" pitchFamily="34" charset="-120"/>
               </a:rPr>
-              <a:t>₹8.1 Cr</a:t>
+              <a:t>₹7.7 Cr</a:t>
             </a:r>
             <a:endParaRPr lang="en-US" sz="2900" dirty="0"/>
           </a:p>
@@ -2373,7 +2373,7 @@
                 <a:ea typeface="Calibri" pitchFamily="34" charset="-122"/>
                 <a:cs typeface="Calibri" pitchFamily="34" charset="-120"/>
               </a:rPr>
-              <a:t>₹14.5 Cr</a:t>
+              <a:t>₹12.2 Cr</a:t>
             </a:r>
             <a:endParaRPr lang="en-US" sz="2900" dirty="0"/>
           </a:p>
@@ -2415,7 +2415,7 @@
                 <a:ea typeface="Calibri" pitchFamily="34" charset="-122"/>
                 <a:cs typeface="Calibri" pitchFamily="34" charset="-120"/>
               </a:rPr>
-              <a:t>₹4.5 Cr over the ceiling</a:t>
+              <a:t>₹2.2 Cr over the ceiling</a:t>
             </a:r>
             <a:endParaRPr lang="en-US" sz="1000" dirty="0"/>
           </a:p>
@@ -3518,7 +3518,7 @@
                           <a:ea typeface="Calibri" pitchFamily="34" charset="-122"/>
                           <a:cs typeface="Calibri" pitchFamily="34" charset="-120"/>
                         </a:rPr>
-                        <a:t>₹3.35 Cr</a:t>
+                        <a:t>₹1.00 Cr</a:t>
                       </a:r>
                       <a:endParaRPr lang="en-US" sz="1050" dirty="0">
                         <a:latin typeface="Calibri" charset="0"/>
@@ -3792,7 +3792,7 @@
                           <a:ea typeface="Calibri" pitchFamily="34" charset="-122"/>
                           <a:cs typeface="Calibri" pitchFamily="34" charset="-120"/>
                         </a:rPr>
-                        <a:t>₹1.39 Cr</a:t>
+                        <a:t>₹1.00 Cr</a:t>
                       </a:r>
                       <a:endParaRPr lang="en-US" sz="1050" dirty="0">
                         <a:latin typeface="Calibri" charset="0"/>
@@ -4066,7 +4066,7 @@
                           <a:ea typeface="Calibri" pitchFamily="34" charset="-122"/>
                           <a:cs typeface="Calibri" pitchFamily="34" charset="-120"/>
                         </a:rPr>
-                        <a:t>21.6%</a:t>
+                        <a:t>28.0%</a:t>
                       </a:r>
                       <a:endParaRPr lang="en-US" sz="1050" dirty="0">
                         <a:latin typeface="Calibri" charset="0"/>
@@ -4340,7 +4340,7 @@
                           <a:ea typeface="Calibri" pitchFamily="34" charset="-122"/>
                           <a:cs typeface="Calibri" pitchFamily="34" charset="-120"/>
                         </a:rPr>
-                        <a:t>18.7%</a:t>
+                        <a:t>43.3%</a:t>
                       </a:r>
                       <a:endParaRPr lang="en-US" sz="1050" dirty="0">
                         <a:latin typeface="Calibri" charset="0"/>
@@ -4614,7 +4614,7 @@
                           <a:ea typeface="Calibri" pitchFamily="34" charset="-122"/>
                           <a:cs typeface="Calibri" pitchFamily="34" charset="-120"/>
                         </a:rPr>
-                        <a:t>+6.2 pp</a:t>
+                        <a:t>+31.2 pp</a:t>
                       </a:r>
                       <a:endParaRPr lang="en-US" sz="1050" dirty="0">
                         <a:latin typeface="Calibri" charset="0"/>
@@ -4888,7 +4888,7 @@
                           <a:ea typeface="Calibri" pitchFamily="34" charset="-122"/>
                           <a:cs typeface="Calibri" pitchFamily="34" charset="-120"/>
                         </a:rPr>
-                        <a:t>1.49×</a:t>
+                        <a:t>2.07×</a:t>
                       </a:r>
                       <a:endParaRPr lang="en-US" sz="1050" dirty="0">
                         <a:latin typeface="Calibri" charset="0"/>
@@ -5436,7 +5436,7 @@
                           <a:ea typeface="Calibri" pitchFamily="34" charset="-122"/>
                           <a:cs typeface="Calibri" pitchFamily="34" charset="-120"/>
                         </a:rPr>
-                        <a:t>4.7%</a:t>
+                        <a:t>19.6%</a:t>
                       </a:r>
                       <a:endParaRPr lang="en-US" sz="1050" dirty="0">
                         <a:latin typeface="Calibri" charset="0"/>
@@ -5504,7 +5504,7 @@
                           <a:ea typeface="Calibri" pitchFamily="34" charset="-122"/>
                           <a:cs typeface="Calibri" pitchFamily="34" charset="-120"/>
                         </a:rPr>
-                        <a:t>1.8%</a:t>
+                        <a:t>5.4%</a:t>
                       </a:r>
                       <a:endParaRPr lang="en-US" sz="1050" dirty="0">
                         <a:latin typeface="Calibri" charset="0"/>
@@ -5572,7 +5572,7 @@
                           <a:ea typeface="Calibri" pitchFamily="34" charset="-122"/>
                           <a:cs typeface="Calibri" pitchFamily="34" charset="-120"/>
                         </a:rPr>
-                        <a:t>6.0%</a:t>
+                        <a:t>8.2%</a:t>
                       </a:r>
                       <a:endParaRPr lang="en-US" sz="1050" dirty="0">
                         <a:latin typeface="Calibri" charset="0"/>
@@ -8046,7 +8046,7 @@
                 <a:ea typeface="Calibri" pitchFamily="34" charset="-122"/>
                 <a:cs typeface="Calibri" pitchFamily="34" charset="-120"/>
               </a:rPr>
-              <a:t>₹14.5 Cr</a:t>
+              <a:t>₹12.2 Cr</a:t>
             </a:r>
             <a:endParaRPr lang="en-US" sz="2600" dirty="0"/>
           </a:p>
@@ -8344,7 +8344,7 @@
                 <a:ea typeface="Calibri" pitchFamily="34" charset="-122"/>
                 <a:cs typeface="Calibri" pitchFamily="34" charset="-120"/>
               </a:rPr>
-              <a:t>₹4.5 Cr</a:t>
+              <a:t>₹2.2 Cr</a:t>
             </a:r>
             <a:endParaRPr lang="en-US" sz="2600" dirty="0"/>
           </a:p>
@@ -9240,7 +9240,7 @@
                 <a:ea typeface="Calibri" pitchFamily="34" charset="-122"/>
                 <a:cs typeface="Calibri" pitchFamily="34" charset="-120"/>
               </a:rPr>
-              <a:t>Only if each clears its walk-away price: ₹45.1 L a year at Geeta Govind Vatika, ₹35.5 L at Ramayan Vatika. Winning at the wrong price is worse than losing.</a:t>
+              <a:t>Only if each clears its walk-away price: ₹80.9 L a year at Geeta Govind Vatika, ₹35.5 L at Ramayan Vatika. Winning at the wrong price is worse than losing.</a:t>
             </a:r>
             <a:endParaRPr lang="en-US" sz="1050" dirty="0"/>
           </a:p>
@@ -9410,7 +9410,7 @@
                 <a:ea typeface="Calibri" pitchFamily="34" charset="-122"/>
                 <a:cs typeface="Calibri" pitchFamily="34" charset="-120"/>
               </a:rPr>
-              <a:t>With ₹10 Cr of guaranteed debt in place the round need not be ₹16 crore. ₹6–8 crore covers what debt cannot reach, at roughly half the dilution — or a CCD at 21.3% without repricing the company.</a:t>
+              <a:t>With ₹10 Cr of guaranteed debt in place the round need not be ₹16 crore. ₹6–8 crore covers what debt cannot reach, at roughly half the dilution — or a CCD at 21.4% without repricing the company.</a:t>
             </a:r>
             <a:endParaRPr lang="en-US" sz="1050" dirty="0"/>
           </a:p>

--- a/pptx/EOD-Project-Finance-Portfolio.pptx
+++ b/pptx/EOD-Project-Finance-Portfolio.pptx
@@ -2133,7 +2133,7 @@
                 <a:ea typeface="Calibri" pitchFamily="34" charset="-122"/>
                 <a:cs typeface="Calibri" pitchFamily="34" charset="-120"/>
               </a:rPr>
-              <a:t>₹7.7 Cr</a:t>
+              <a:t>₹7.3 Cr</a:t>
             </a:r>
             <a:endParaRPr lang="en-US" sz="2900" dirty="0"/>
           </a:p>
@@ -2587,7 +2587,7 @@
                 <a:ea typeface="Calibri" pitchFamily="34" charset="-122"/>
                 <a:cs typeface="Calibri" pitchFamily="34" charset="-120"/>
               </a:rPr>
-              <a:t>The same analysis run three times. What differs is not the method — it is how much capital each genuinely consumes, and what it earns on it.</a:t>
+              <a:t>The same analysis three times. What differs is how much capital each consumes, and what it earns on it.</a:t>
             </a:r>
             <a:endParaRPr lang="en-US" sz="1250" dirty="0"/>
           </a:p>
@@ -2621,7 +2621,7 @@
                 <a:gridCol w="2466746"/>
                 <a:gridCol w="2466746"/>
               </a:tblGrid>
-              <a:tr h="301752">
+              <a:tr h="274320">
                 <a:tc>
                   <a:txBody>
                     <a:bodyPr/>
@@ -2884,7 +2884,7 @@
                   </a:tcPr>
                 </a:tc>
               </a:tr>
-              <a:tr h="301752">
+              <a:tr h="274320">
                 <a:tc>
                   <a:txBody>
                     <a:bodyPr/>
@@ -3158,7 +3158,7 @@
                   </a:tcPr>
                 </a:tc>
               </a:tr>
-              <a:tr h="301752">
+              <a:tr h="274320">
                 <a:tc>
                   <a:txBody>
                     <a:bodyPr/>
@@ -3432,7 +3432,7 @@
                   </a:tcPr>
                 </a:tc>
               </a:tr>
-              <a:tr h="301752">
+              <a:tr h="274320">
                 <a:tc>
                   <a:txBody>
                     <a:bodyPr/>
@@ -3706,7 +3706,7 @@
                   </a:tcPr>
                 </a:tc>
               </a:tr>
-              <a:tr h="301752">
+              <a:tr h="274320">
                 <a:tc>
                   <a:txBody>
                     <a:bodyPr/>
@@ -3792,7 +3792,7 @@
                           <a:ea typeface="Calibri" pitchFamily="34" charset="-122"/>
                           <a:cs typeface="Calibri" pitchFamily="34" charset="-120"/>
                         </a:rPr>
-                        <a:t>₹1.00 Cr</a:t>
+                        <a:t>₹0.58 Cr</a:t>
                       </a:r>
                       <a:endParaRPr lang="en-US" sz="1050" dirty="0">
                         <a:latin typeface="Calibri" charset="0"/>
@@ -3980,7 +3980,7 @@
                   </a:tcPr>
                 </a:tc>
               </a:tr>
-              <a:tr h="301752">
+              <a:tr h="274320">
                 <a:tc>
                   <a:txBody>
                     <a:bodyPr/>
@@ -4066,7 +4066,7 @@
                           <a:ea typeface="Calibri" pitchFamily="34" charset="-122"/>
                           <a:cs typeface="Calibri" pitchFamily="34" charset="-120"/>
                         </a:rPr>
-                        <a:t>28.0%</a:t>
+                        <a:t>26.0%</a:t>
                       </a:r>
                       <a:endParaRPr lang="en-US" sz="1050" dirty="0">
                         <a:latin typeface="Calibri" charset="0"/>
@@ -4254,7 +4254,7 @@
                   </a:tcPr>
                 </a:tc>
               </a:tr>
-              <a:tr h="301752">
+              <a:tr h="274320">
                 <a:tc>
                   <a:txBody>
                     <a:bodyPr/>
@@ -4340,7 +4340,7 @@
                           <a:ea typeface="Calibri" pitchFamily="34" charset="-122"/>
                           <a:cs typeface="Calibri" pitchFamily="34" charset="-120"/>
                         </a:rPr>
-                        <a:t>43.3%</a:t>
+                        <a:t>55.2%</a:t>
                       </a:r>
                       <a:endParaRPr lang="en-US" sz="1050" dirty="0">
                         <a:latin typeface="Calibri" charset="0"/>
@@ -4528,7 +4528,7 @@
                   </a:tcPr>
                 </a:tc>
               </a:tr>
-              <a:tr h="301752">
+              <a:tr h="274320">
                 <a:tc>
                   <a:txBody>
                     <a:bodyPr/>
@@ -4614,7 +4614,7 @@
                           <a:ea typeface="Calibri" pitchFamily="34" charset="-122"/>
                           <a:cs typeface="Calibri" pitchFamily="34" charset="-120"/>
                         </a:rPr>
-                        <a:t>+31.2 pp</a:t>
+                        <a:t>+43.1 pp</a:t>
                       </a:r>
                       <a:endParaRPr lang="en-US" sz="1050" dirty="0">
                         <a:latin typeface="Calibri" charset="0"/>
@@ -4802,7 +4802,7 @@
                   </a:tcPr>
                 </a:tc>
               </a:tr>
-              <a:tr h="301752">
+              <a:tr h="274320">
                 <a:tc>
                   <a:txBody>
                     <a:bodyPr/>
@@ -4888,7 +4888,7 @@
                           <a:ea typeface="Calibri" pitchFamily="34" charset="-122"/>
                           <a:cs typeface="Calibri" pitchFamily="34" charset="-120"/>
                         </a:rPr>
-                        <a:t>2.07×</a:t>
+                        <a:t>2.11×</a:t>
                       </a:r>
                       <a:endParaRPr lang="en-US" sz="1050" dirty="0">
                         <a:latin typeface="Calibri" charset="0"/>
@@ -5076,7 +5076,7 @@
                   </a:tcPr>
                 </a:tc>
               </a:tr>
-              <a:tr h="301752">
+              <a:tr h="274320">
                 <a:tc>
                   <a:txBody>
                     <a:bodyPr/>
@@ -5350,7 +5350,7 @@
                   </a:tcPr>
                 </a:tc>
               </a:tr>
-              <a:tr h="301752">
+              <a:tr h="274320">
                 <a:tc>
                   <a:txBody>
                     <a:bodyPr/>
@@ -5436,7 +5436,7 @@
                           <a:ea typeface="Calibri" pitchFamily="34" charset="-122"/>
                           <a:cs typeface="Calibri" pitchFamily="34" charset="-120"/>
                         </a:rPr>
-                        <a:t>19.6%</a:t>
+                        <a:t>29.4%</a:t>
                       </a:r>
                       <a:endParaRPr lang="en-US" sz="1050" dirty="0">
                         <a:latin typeface="Calibri" charset="0"/>
@@ -5624,7 +5624,7 @@
                   </a:tcPr>
                 </a:tc>
               </a:tr>
-              <a:tr h="301752">
+              <a:tr h="274320">
                 <a:tc>
                   <a:txBody>
                     <a:bodyPr/>
@@ -5910,7 +5910,7 @@
         </p:nvSpPr>
         <p:spPr>
           <a:xfrm>
-            <a:off x="566928" y="5095748"/>
+            <a:off x="566928" y="5064125"/>
             <a:ext cx="11057839" cy="1267684"/>
           </a:xfrm>
           <a:prstGeom prst="roundRect">
@@ -5937,7 +5937,7 @@
         </p:nvSpPr>
         <p:spPr>
           <a:xfrm>
-            <a:off x="804672" y="5205476"/>
+            <a:off x="804672" y="5173853"/>
             <a:ext cx="2743200" cy="182880"/>
           </a:xfrm>
           <a:prstGeom prst="rect">
@@ -5976,7 +5976,7 @@
         </p:nvSpPr>
         <p:spPr>
           <a:xfrm>
-            <a:off x="804672" y="5388356"/>
+            <a:off x="804672" y="5356733"/>
             <a:ext cx="10582351" cy="212649"/>
           </a:xfrm>
           <a:prstGeom prst="rect">
@@ -6018,7 +6018,7 @@
         </p:nvSpPr>
         <p:spPr>
           <a:xfrm>
-            <a:off x="804672" y="5655869"/>
+            <a:off x="804672" y="5624246"/>
             <a:ext cx="10582351" cy="634411"/>
           </a:xfrm>
           <a:prstGeom prst="rect">
@@ -6046,7 +6046,7 @@
                 <a:ea typeface="Calibri" pitchFamily="34" charset="-122"/>
                 <a:cs typeface="Calibri" pitchFamily="34" charset="-120"/>
               </a:rPr>
-              <a:t>None of the three clears an equity hurdle at project level, and it is not because any is a bad project. A single park generating ₹1–2.5 crore of mature EBITDA cannot pay a 22% return on the capital it needs and leave an operator's margin. Equity works on a portfolio and a brand; it does not work one licence at a time. Two of the three out-earn guaranteed debt comfortably — fund them with it and keep the spread.</a:t>
+              <a:t>None of the three clears an equity hurdle at project level, and not because any is a bad project: a single park generating ₹1–2.5 crore of mature EBITDA cannot pay a 22% return and still leave an operator's margin. Equity works on a portfolio and a brand, not one licence at a time. Two of the three out-earn guaranteed debt comfortably — fund them with it and keep the spread.</a:t>
             </a:r>
             <a:endParaRPr lang="en-US" sz="900" dirty="0"/>
           </a:p>
@@ -9240,7 +9240,7 @@
                 <a:ea typeface="Calibri" pitchFamily="34" charset="-122"/>
                 <a:cs typeface="Calibri" pitchFamily="34" charset="-120"/>
               </a:rPr>
-              <a:t>Only if each clears its walk-away price: ₹80.9 L a year at Geeta Govind Vatika, ₹35.5 L at Ramayan Vatika. Winning at the wrong price is worse than losing.</a:t>
+              <a:t>Only if each clears its walk-away price: ₹76.8 L a year at Geeta Govind Vatika, ₹35.5 L at Ramayan Vatika. Winning at the wrong price is worse than losing.</a:t>
             </a:r>
             <a:endParaRPr lang="en-US" sz="1050" dirty="0"/>
           </a:p>
@@ -9410,7 +9410,7 @@
                 <a:ea typeface="Calibri" pitchFamily="34" charset="-122"/>
                 <a:cs typeface="Calibri" pitchFamily="34" charset="-120"/>
               </a:rPr>
-              <a:t>With ₹10 Cr of guaranteed debt in place the round need not be ₹16 crore. ₹6–8 crore covers what debt cannot reach, at roughly half the dilution — or a CCD at 21.4% without repricing the company.</a:t>
+              <a:t>With ₹10 Cr of guaranteed debt in place the round need not be ₹16 crore. ₹6–8 crore covers what debt cannot reach, at roughly half the dilution — or a CCD at 21.2% without repricing the company.</a:t>
             </a:r>
             <a:endParaRPr lang="en-US" sz="1050" dirty="0"/>
           </a:p>

--- a/pptx/EOD-Project-Finance-Portfolio.pptx
+++ b/pptx/EOD-Project-Finance-Portfolio.pptx
@@ -1853,7 +1853,7 @@
                 <a:ea typeface="Calibri" pitchFamily="34" charset="-122"/>
                 <a:cs typeface="Calibri" pitchFamily="34" charset="-120"/>
               </a:rPr>
-              <a:t>Geeta Govind Vatika, Ramayan Vatika and Karnal, each modelled as equity, guaranteed debt, and debt that converts to equity — plus the company-level view that ties them together. Built on the ₹10 crore CGTMSE ceiling that came into force in April 2025.</a:t>
+              <a:t>Geeta Govind Vatika on guaranteed debt; Ramayan Vatika and Karnal each modelled as equity, guaranteed debt, and debt that converts to equity — plus the company-level view that ties them together. Built on the ₹10 crore CGTMSE ceiling that came into force in April 2025.</a:t>
             </a:r>
             <a:endParaRPr lang="en-US" sz="1500" dirty="0"/>
           </a:p>
@@ -2616,12 +2616,12 @@
             <a:tbl>
               <a:tblPr/>
               <a:tblGrid>
-                <a:gridCol w="3657600"/>
-                <a:gridCol w="2466746"/>
-                <a:gridCol w="2466746"/>
-                <a:gridCol w="2466746"/>
+                <a:gridCol w="3840480"/>
+                <a:gridCol w="2405786"/>
+                <a:gridCol w="2405786"/>
+                <a:gridCol w="2405786"/>
               </a:tblGrid>
-              <a:tr h="274320">
+              <a:tr h="256032">
                 <a:tc>
                   <a:txBody>
                     <a:bodyPr/>
@@ -2884,7 +2884,7 @@
                   </a:tcPr>
                 </a:tc>
               </a:tr>
-              <a:tr h="274320">
+              <a:tr h="256032">
                 <a:tc>
                   <a:txBody>
                     <a:bodyPr/>
@@ -2894,7 +2894,7 @@
                         <a:buNone/>
                       </a:pPr>
                       <a:r>
-                        <a:rPr lang="en-US" sz="1050" dirty="0">
+                        <a:rPr lang="en-US" sz="1000" dirty="0">
                           <a:solidFill>
                             <a:srgbClr val="3B4660"/>
                           </a:solidFill>
@@ -2904,7 +2904,7 @@
                         </a:rPr>
                         <a:t>Counterparty</a:t>
                       </a:r>
-                      <a:endParaRPr lang="en-US" sz="1050" dirty="0">
+                      <a:endParaRPr lang="en-US" sz="1000" dirty="0">
                         <a:latin typeface="Calibri" charset="0"/>
                         <a:ea typeface="Calibri" charset="0"/>
                         <a:cs typeface="Calibri" charset="0"/>
@@ -2962,7 +2962,7 @@
                         <a:buNone/>
                       </a:pPr>
                       <a:r>
-                        <a:rPr lang="en-US" sz="1050" dirty="0">
+                        <a:rPr lang="en-US" sz="1000" dirty="0">
                           <a:solidFill>
                             <a:srgbClr val="3B4660"/>
                           </a:solidFill>
@@ -2972,7 +2972,7 @@
                         </a:rPr>
                         <a:t>Agra Dev. Authority</a:t>
                       </a:r>
-                      <a:endParaRPr lang="en-US" sz="1050" dirty="0">
+                      <a:endParaRPr lang="en-US" sz="1000" dirty="0">
                         <a:latin typeface="Calibri" charset="0"/>
                         <a:ea typeface="Calibri" charset="0"/>
                         <a:cs typeface="Calibri" charset="0"/>
@@ -3030,7 +3030,7 @@
                         <a:buNone/>
                       </a:pPr>
                       <a:r>
-                        <a:rPr lang="en-US" sz="1050" dirty="0">
+                        <a:rPr lang="en-US" sz="1000" dirty="0">
                           <a:solidFill>
                             <a:srgbClr val="3B4660"/>
                           </a:solidFill>
@@ -3040,7 +3040,7 @@
                         </a:rPr>
                         <a:t>Bareilly Dev. Authority</a:t>
                       </a:r>
-                      <a:endParaRPr lang="en-US" sz="1050" dirty="0">
+                      <a:endParaRPr lang="en-US" sz="1000" dirty="0">
                         <a:latin typeface="Calibri" charset="0"/>
                         <a:ea typeface="Calibri" charset="0"/>
                         <a:cs typeface="Calibri" charset="0"/>
@@ -3098,7 +3098,7 @@
                         <a:buNone/>
                       </a:pPr>
                       <a:r>
-                        <a:rPr lang="en-US" sz="1050" dirty="0">
+                        <a:rPr lang="en-US" sz="1000" dirty="0">
                           <a:solidFill>
                             <a:srgbClr val="3B4660"/>
                           </a:solidFill>
@@ -3108,7 +3108,7 @@
                         </a:rPr>
                         <a:t>A4A Highway Nest LLP</a:t>
                       </a:r>
-                      <a:endParaRPr lang="en-US" sz="1050" dirty="0">
+                      <a:endParaRPr lang="en-US" sz="1000" dirty="0">
                         <a:latin typeface="Calibri" charset="0"/>
                         <a:ea typeface="Calibri" charset="0"/>
                         <a:cs typeface="Calibri" charset="0"/>
@@ -3158,7 +3158,7 @@
                   </a:tcPr>
                 </a:tc>
               </a:tr>
-              <a:tr h="274320">
+              <a:tr h="256032">
                 <a:tc>
                   <a:txBody>
                     <a:bodyPr/>
@@ -3168,7 +3168,7 @@
                         <a:buNone/>
                       </a:pPr>
                       <a:r>
-                        <a:rPr lang="en-US" sz="1050" dirty="0">
+                        <a:rPr lang="en-US" sz="1000" dirty="0">
                           <a:solidFill>
                             <a:srgbClr val="3B4660"/>
                           </a:solidFill>
@@ -3178,7 +3178,7 @@
                         </a:rPr>
                         <a:t>Term / lock-in</a:t>
                       </a:r>
-                      <a:endParaRPr lang="en-US" sz="1050" dirty="0">
+                      <a:endParaRPr lang="en-US" sz="1000" dirty="0">
                         <a:latin typeface="Calibri" charset="0"/>
                         <a:ea typeface="Calibri" charset="0"/>
                         <a:cs typeface="Calibri" charset="0"/>
@@ -3236,7 +3236,7 @@
                         <a:buNone/>
                       </a:pPr>
                       <a:r>
-                        <a:rPr lang="en-US" sz="1050" dirty="0">
+                        <a:rPr lang="en-US" sz="1000" dirty="0">
                           <a:solidFill>
                             <a:srgbClr val="3B4660"/>
                           </a:solidFill>
@@ -3246,7 +3246,7 @@
                         </a:rPr>
                         <a:t>7 + 4 yrs · none</a:t>
                       </a:r>
-                      <a:endParaRPr lang="en-US" sz="1050" dirty="0">
+                      <a:endParaRPr lang="en-US" sz="1000" dirty="0">
                         <a:latin typeface="Calibri" charset="0"/>
                         <a:ea typeface="Calibri" charset="0"/>
                         <a:cs typeface="Calibri" charset="0"/>
@@ -3304,7 +3304,7 @@
                         <a:buNone/>
                       </a:pPr>
                       <a:r>
-                        <a:rPr lang="en-US" sz="1050" dirty="0">
+                        <a:rPr lang="en-US" sz="1000" dirty="0">
                           <a:solidFill>
                             <a:srgbClr val="3B4660"/>
                           </a:solidFill>
@@ -3314,7 +3314,7 @@
                         </a:rPr>
                         <a:t>10 + 5 yrs · 5 years</a:t>
                       </a:r>
-                      <a:endParaRPr lang="en-US" sz="1050" dirty="0">
+                      <a:endParaRPr lang="en-US" sz="1000" dirty="0">
                         <a:latin typeface="Calibri" charset="0"/>
                         <a:ea typeface="Calibri" charset="0"/>
                         <a:cs typeface="Calibri" charset="0"/>
@@ -3372,7 +3372,7 @@
                         <a:buNone/>
                       </a:pPr>
                       <a:r>
-                        <a:rPr lang="en-US" sz="1050" dirty="0">
+                        <a:rPr lang="en-US" sz="1000" dirty="0">
                           <a:solidFill>
                             <a:srgbClr val="3B4660"/>
                           </a:solidFill>
@@ -3382,7 +3382,7 @@
                         </a:rPr>
                         <a:t>15 yrs · none</a:t>
                       </a:r>
-                      <a:endParaRPr lang="en-US" sz="1050" dirty="0">
+                      <a:endParaRPr lang="en-US" sz="1000" dirty="0">
                         <a:latin typeface="Calibri" charset="0"/>
                         <a:ea typeface="Calibri" charset="0"/>
                         <a:cs typeface="Calibri" charset="0"/>
@@ -3432,7 +3432,7 @@
                   </a:tcPr>
                 </a:tc>
               </a:tr>
-              <a:tr h="274320">
+              <a:tr h="256032">
                 <a:tc>
                   <a:txBody>
                     <a:bodyPr/>
@@ -3442,7 +3442,7 @@
                         <a:buNone/>
                       </a:pPr>
                       <a:r>
-                        <a:rPr lang="en-US" sz="1050" dirty="0">
+                        <a:rPr lang="en-US" sz="1000" dirty="0">
                           <a:solidFill>
                             <a:srgbClr val="3B4660"/>
                           </a:solidFill>
@@ -3452,7 +3452,7 @@
                         </a:rPr>
                         <a:t>Funding sought</a:t>
                       </a:r>
-                      <a:endParaRPr lang="en-US" sz="1050" dirty="0">
+                      <a:endParaRPr lang="en-US" sz="1000" dirty="0">
                         <a:latin typeface="Calibri" charset="0"/>
                         <a:ea typeface="Calibri" charset="0"/>
                         <a:cs typeface="Calibri" charset="0"/>
@@ -3510,7 +3510,7 @@
                         <a:buNone/>
                       </a:pPr>
                       <a:r>
-                        <a:rPr lang="en-US" sz="1050" dirty="0">
+                        <a:rPr lang="en-US" sz="1000" dirty="0">
                           <a:solidFill>
                             <a:srgbClr val="3B4660"/>
                           </a:solidFill>
@@ -3520,7 +3520,7 @@
                         </a:rPr>
                         <a:t>₹1.00 Cr</a:t>
                       </a:r>
-                      <a:endParaRPr lang="en-US" sz="1050" dirty="0">
+                      <a:endParaRPr lang="en-US" sz="1000" dirty="0">
                         <a:latin typeface="Calibri" charset="0"/>
                         <a:ea typeface="Calibri" charset="0"/>
                         <a:cs typeface="Calibri" charset="0"/>
@@ -3578,7 +3578,7 @@
                         <a:buNone/>
                       </a:pPr>
                       <a:r>
-                        <a:rPr lang="en-US" sz="1050" dirty="0">
+                        <a:rPr lang="en-US" sz="1000" dirty="0">
                           <a:solidFill>
                             <a:srgbClr val="3B4660"/>
                           </a:solidFill>
@@ -3588,7 +3588,7 @@
                         </a:rPr>
                         <a:t>₹4.17 Cr</a:t>
                       </a:r>
-                      <a:endParaRPr lang="en-US" sz="1050" dirty="0">
+                      <a:endParaRPr lang="en-US" sz="1000" dirty="0">
                         <a:latin typeface="Calibri" charset="0"/>
                         <a:ea typeface="Calibri" charset="0"/>
                         <a:cs typeface="Calibri" charset="0"/>
@@ -3646,7 +3646,7 @@
                         <a:buNone/>
                       </a:pPr>
                       <a:r>
-                        <a:rPr lang="en-US" sz="1050" dirty="0">
+                        <a:rPr lang="en-US" sz="1000" dirty="0">
                           <a:solidFill>
                             <a:srgbClr val="3B4660"/>
                           </a:solidFill>
@@ -3656,7 +3656,7 @@
                         </a:rPr>
                         <a:t>₹4.00 Cr</a:t>
                       </a:r>
-                      <a:endParaRPr lang="en-US" sz="1050" dirty="0">
+                      <a:endParaRPr lang="en-US" sz="1000" dirty="0">
                         <a:latin typeface="Calibri" charset="0"/>
                         <a:ea typeface="Calibri" charset="0"/>
                         <a:cs typeface="Calibri" charset="0"/>
@@ -3706,7 +3706,7 @@
                   </a:tcPr>
                 </a:tc>
               </a:tr>
-              <a:tr h="274320">
+              <a:tr h="256032">
                 <a:tc>
                   <a:txBody>
                     <a:bodyPr/>
@@ -3716,7 +3716,7 @@
                         <a:buNone/>
                       </a:pPr>
                       <a:r>
-                        <a:rPr lang="en-US" sz="1050" dirty="0">
+                        <a:rPr lang="en-US" sz="1000" dirty="0">
                           <a:solidFill>
                             <a:srgbClr val="3B4660"/>
                           </a:solidFill>
@@ -3726,7 +3726,7 @@
                         </a:rPr>
                         <a:t>True capital at risk</a:t>
                       </a:r>
-                      <a:endParaRPr lang="en-US" sz="1050" dirty="0">
+                      <a:endParaRPr lang="en-US" sz="1000" dirty="0">
                         <a:latin typeface="Calibri" charset="0"/>
                         <a:ea typeface="Calibri" charset="0"/>
                         <a:cs typeface="Calibri" charset="0"/>
@@ -3784,7 +3784,7 @@
                         <a:buNone/>
                       </a:pPr>
                       <a:r>
-                        <a:rPr lang="en-US" sz="1050" dirty="0">
+                        <a:rPr lang="en-US" sz="1000" dirty="0">
                           <a:solidFill>
                             <a:srgbClr val="3B4660"/>
                           </a:solidFill>
@@ -3794,7 +3794,7 @@
                         </a:rPr>
                         <a:t>₹0.58 Cr</a:t>
                       </a:r>
-                      <a:endParaRPr lang="en-US" sz="1050" dirty="0">
+                      <a:endParaRPr lang="en-US" sz="1000" dirty="0">
                         <a:latin typeface="Calibri" charset="0"/>
                         <a:ea typeface="Calibri" charset="0"/>
                         <a:cs typeface="Calibri" charset="0"/>
@@ -3852,7 +3852,7 @@
                         <a:buNone/>
                       </a:pPr>
                       <a:r>
-                        <a:rPr lang="en-US" sz="1050" dirty="0">
+                        <a:rPr lang="en-US" sz="1000" dirty="0">
                           <a:solidFill>
                             <a:srgbClr val="3B4660"/>
                           </a:solidFill>
@@ -3862,7 +3862,7 @@
                         </a:rPr>
                         <a:t>₹2.36 Cr</a:t>
                       </a:r>
-                      <a:endParaRPr lang="en-US" sz="1050" dirty="0">
+                      <a:endParaRPr lang="en-US" sz="1000" dirty="0">
                         <a:latin typeface="Calibri" charset="0"/>
                         <a:ea typeface="Calibri" charset="0"/>
                         <a:cs typeface="Calibri" charset="0"/>
@@ -3920,7 +3920,7 @@
                         <a:buNone/>
                       </a:pPr>
                       <a:r>
-                        <a:rPr lang="en-US" sz="1050" dirty="0">
+                        <a:rPr lang="en-US" sz="1000" dirty="0">
                           <a:solidFill>
                             <a:srgbClr val="3B4660"/>
                           </a:solidFill>
@@ -3930,7 +3930,7 @@
                         </a:rPr>
                         <a:t>₹4.38 Cr</a:t>
                       </a:r>
-                      <a:endParaRPr lang="en-US" sz="1050" dirty="0">
+                      <a:endParaRPr lang="en-US" sz="1000" dirty="0">
                         <a:latin typeface="Calibri" charset="0"/>
                         <a:ea typeface="Calibri" charset="0"/>
                         <a:cs typeface="Calibri" charset="0"/>
@@ -3980,7 +3980,7 @@
                   </a:tcPr>
                 </a:tc>
               </a:tr>
-              <a:tr h="274320">
+              <a:tr h="256032">
                 <a:tc>
                   <a:txBody>
                     <a:bodyPr/>
@@ -3990,7 +3990,7 @@
                         <a:buNone/>
                       </a:pPr>
                       <a:r>
-                        <a:rPr lang="en-US" sz="1050" dirty="0">
+                        <a:rPr lang="en-US" sz="1000" dirty="0">
                           <a:solidFill>
                             <a:srgbClr val="3B4660"/>
                           </a:solidFill>
@@ -4000,7 +4000,7 @@
                         </a:rPr>
                         <a:t>Stabilised EBITDA margin (yr 5)</a:t>
                       </a:r>
-                      <a:endParaRPr lang="en-US" sz="1050" dirty="0">
+                      <a:endParaRPr lang="en-US" sz="1000" dirty="0">
                         <a:latin typeface="Calibri" charset="0"/>
                         <a:ea typeface="Calibri" charset="0"/>
                         <a:cs typeface="Calibri" charset="0"/>
@@ -4058,7 +4058,7 @@
                         <a:buNone/>
                       </a:pPr>
                       <a:r>
-                        <a:rPr lang="en-US" sz="1050" dirty="0">
+                        <a:rPr lang="en-US" sz="1000" dirty="0">
                           <a:solidFill>
                             <a:srgbClr val="3B4660"/>
                           </a:solidFill>
@@ -4068,7 +4068,7 @@
                         </a:rPr>
                         <a:t>26.0%</a:t>
                       </a:r>
-                      <a:endParaRPr lang="en-US" sz="1050" dirty="0">
+                      <a:endParaRPr lang="en-US" sz="1000" dirty="0">
                         <a:latin typeface="Calibri" charset="0"/>
                         <a:ea typeface="Calibri" charset="0"/>
                         <a:cs typeface="Calibri" charset="0"/>
@@ -4126,7 +4126,7 @@
                         <a:buNone/>
                       </a:pPr>
                       <a:r>
-                        <a:rPr lang="en-US" sz="1050" dirty="0">
+                        <a:rPr lang="en-US" sz="1000" dirty="0">
                           <a:solidFill>
                             <a:srgbClr val="3B4660"/>
                           </a:solidFill>
@@ -4136,7 +4136,7 @@
                         </a:rPr>
                         <a:t>20.3%</a:t>
                       </a:r>
-                      <a:endParaRPr lang="en-US" sz="1050" dirty="0">
+                      <a:endParaRPr lang="en-US" sz="1000" dirty="0">
                         <a:latin typeface="Calibri" charset="0"/>
                         <a:ea typeface="Calibri" charset="0"/>
                         <a:cs typeface="Calibri" charset="0"/>
@@ -4194,7 +4194,7 @@
                         <a:buNone/>
                       </a:pPr>
                       <a:r>
-                        <a:rPr lang="en-US" sz="1050" dirty="0">
+                        <a:rPr lang="en-US" sz="1000" dirty="0">
                           <a:solidFill>
                             <a:srgbClr val="3B4660"/>
                           </a:solidFill>
@@ -4204,7 +4204,7 @@
                         </a:rPr>
                         <a:t>37.7%</a:t>
                       </a:r>
-                      <a:endParaRPr lang="en-US" sz="1050" dirty="0">
+                      <a:endParaRPr lang="en-US" sz="1000" dirty="0">
                         <a:latin typeface="Calibri" charset="0"/>
                         <a:ea typeface="Calibri" charset="0"/>
                         <a:cs typeface="Calibri" charset="0"/>
@@ -4254,7 +4254,7 @@
                   </a:tcPr>
                 </a:tc>
               </a:tr>
-              <a:tr h="274320">
+              <a:tr h="256032">
                 <a:tc>
                   <a:txBody>
                     <a:bodyPr/>
@@ -4264,7 +4264,7 @@
                         <a:buNone/>
                       </a:pPr>
                       <a:r>
-                        <a:rPr lang="en-US" sz="1050" b="1" dirty="0">
+                        <a:rPr lang="en-US" sz="1000" b="1" dirty="0">
                           <a:solidFill>
                             <a:srgbClr val="3B4660"/>
                           </a:solidFill>
@@ -4274,7 +4274,7 @@
                         </a:rPr>
                         <a:t>Project IRR</a:t>
                       </a:r>
-                      <a:endParaRPr lang="en-US" sz="1050" dirty="0">
+                      <a:endParaRPr lang="en-US" sz="1000" dirty="0">
                         <a:latin typeface="Calibri" charset="0"/>
                         <a:ea typeface="Calibri" charset="0"/>
                         <a:cs typeface="Calibri" charset="0"/>
@@ -4332,7 +4332,7 @@
                         <a:buNone/>
                       </a:pPr>
                       <a:r>
-                        <a:rPr lang="en-US" sz="1050" dirty="0">
+                        <a:rPr lang="en-US" sz="1000" dirty="0">
                           <a:solidFill>
                             <a:srgbClr val="10B981"/>
                           </a:solidFill>
@@ -4342,7 +4342,7 @@
                         </a:rPr>
                         <a:t>55.2%</a:t>
                       </a:r>
-                      <a:endParaRPr lang="en-US" sz="1050" dirty="0">
+                      <a:endParaRPr lang="en-US" sz="1000" dirty="0">
                         <a:latin typeface="Calibri" charset="0"/>
                         <a:ea typeface="Calibri" charset="0"/>
                         <a:cs typeface="Calibri" charset="0"/>
@@ -4400,7 +4400,7 @@
                         <a:buNone/>
                       </a:pPr>
                       <a:r>
-                        <a:rPr lang="en-US" sz="1050" dirty="0">
+                        <a:rPr lang="en-US" sz="1000" dirty="0">
                           <a:solidFill>
                             <a:srgbClr val="C8553D"/>
                           </a:solidFill>
@@ -4410,7 +4410,7 @@
                         </a:rPr>
                         <a:t>11.4%</a:t>
                       </a:r>
-                      <a:endParaRPr lang="en-US" sz="1050" dirty="0">
+                      <a:endParaRPr lang="en-US" sz="1000" dirty="0">
                         <a:latin typeface="Calibri" charset="0"/>
                         <a:ea typeface="Calibri" charset="0"/>
                         <a:cs typeface="Calibri" charset="0"/>
@@ -4468,7 +4468,7 @@
                         <a:buNone/>
                       </a:pPr>
                       <a:r>
-                        <a:rPr lang="en-US" sz="1050" dirty="0">
+                        <a:rPr lang="en-US" sz="1000" dirty="0">
                           <a:solidFill>
                             <a:srgbClr val="10B981"/>
                           </a:solidFill>
@@ -4478,7 +4478,7 @@
                         </a:rPr>
                         <a:t>19.5%</a:t>
                       </a:r>
-                      <a:endParaRPr lang="en-US" sz="1050" dirty="0">
+                      <a:endParaRPr lang="en-US" sz="1000" dirty="0">
                         <a:latin typeface="Calibri" charset="0"/>
                         <a:ea typeface="Calibri" charset="0"/>
                         <a:cs typeface="Calibri" charset="0"/>
@@ -4528,7 +4528,7 @@
                   </a:tcPr>
                 </a:tc>
               </a:tr>
-              <a:tr h="274320">
+              <a:tr h="256032">
                 <a:tc>
                   <a:txBody>
                     <a:bodyPr/>
@@ -4538,7 +4538,7 @@
                         <a:buNone/>
                       </a:pPr>
                       <a:r>
-                        <a:rPr lang="en-US" sz="1050" dirty="0">
+                        <a:rPr lang="en-US" sz="1000" dirty="0">
                           <a:solidFill>
                             <a:srgbClr val="3B4660"/>
                           </a:solidFill>
@@ -4548,7 +4548,7 @@
                         </a:rPr>
                         <a:t>Spread over guaranteed debt</a:t>
                       </a:r>
-                      <a:endParaRPr lang="en-US" sz="1050" dirty="0">
+                      <a:endParaRPr lang="en-US" sz="1000" dirty="0">
                         <a:latin typeface="Calibri" charset="0"/>
                         <a:ea typeface="Calibri" charset="0"/>
                         <a:cs typeface="Calibri" charset="0"/>
@@ -4606,7 +4606,7 @@
                         <a:buNone/>
                       </a:pPr>
                       <a:r>
-                        <a:rPr lang="en-US" sz="1050" dirty="0">
+                        <a:rPr lang="en-US" sz="1000" dirty="0">
                           <a:solidFill>
                             <a:srgbClr val="10B981"/>
                           </a:solidFill>
@@ -4616,7 +4616,7 @@
                         </a:rPr>
                         <a:t>+43.1 pp</a:t>
                       </a:r>
-                      <a:endParaRPr lang="en-US" sz="1050" dirty="0">
+                      <a:endParaRPr lang="en-US" sz="1000" dirty="0">
                         <a:latin typeface="Calibri" charset="0"/>
                         <a:ea typeface="Calibri" charset="0"/>
                         <a:cs typeface="Calibri" charset="0"/>
@@ -4674,7 +4674,7 @@
                         <a:buNone/>
                       </a:pPr>
                       <a:r>
-                        <a:rPr lang="en-US" sz="1050" dirty="0">
+                        <a:rPr lang="en-US" sz="1000" dirty="0">
                           <a:solidFill>
                             <a:srgbClr val="C8553D"/>
                           </a:solidFill>
@@ -4684,7 +4684,7 @@
                         </a:rPr>
                         <a:t>-1.1 pp</a:t>
                       </a:r>
-                      <a:endParaRPr lang="en-US" sz="1050" dirty="0">
+                      <a:endParaRPr lang="en-US" sz="1000" dirty="0">
                         <a:latin typeface="Calibri" charset="0"/>
                         <a:ea typeface="Calibri" charset="0"/>
                         <a:cs typeface="Calibri" charset="0"/>
@@ -4742,7 +4742,7 @@
                         <a:buNone/>
                       </a:pPr>
                       <a:r>
-                        <a:rPr lang="en-US" sz="1050" dirty="0">
+                        <a:rPr lang="en-US" sz="1000" dirty="0">
                           <a:solidFill>
                             <a:srgbClr val="10B981"/>
                           </a:solidFill>
@@ -4752,7 +4752,7 @@
                         </a:rPr>
                         <a:t>+7.0 pp</a:t>
                       </a:r>
-                      <a:endParaRPr lang="en-US" sz="1050" dirty="0">
+                      <a:endParaRPr lang="en-US" sz="1000" dirty="0">
                         <a:latin typeface="Calibri" charset="0"/>
                         <a:ea typeface="Calibri" charset="0"/>
                         <a:cs typeface="Calibri" charset="0"/>
@@ -4802,7 +4802,7 @@
                   </a:tcPr>
                 </a:tc>
               </a:tr>
-              <a:tr h="274320">
+              <a:tr h="256032">
                 <a:tc>
                   <a:txBody>
                     <a:bodyPr/>
@@ -4812,7 +4812,7 @@
                         <a:buNone/>
                       </a:pPr>
                       <a:r>
-                        <a:rPr lang="en-US" sz="1050" dirty="0">
+                        <a:rPr lang="en-US" sz="1000" dirty="0">
                           <a:solidFill>
                             <a:srgbClr val="3B4660"/>
                           </a:solidFill>
@@ -4822,7 +4822,7 @@
                         </a:rPr>
                         <a:t>Minimum DSCR at the size asked</a:t>
                       </a:r>
-                      <a:endParaRPr lang="en-US" sz="1050" dirty="0">
+                      <a:endParaRPr lang="en-US" sz="1000" dirty="0">
                         <a:latin typeface="Calibri" charset="0"/>
                         <a:ea typeface="Calibri" charset="0"/>
                         <a:cs typeface="Calibri" charset="0"/>
@@ -4880,7 +4880,7 @@
                         <a:buNone/>
                       </a:pPr>
                       <a:r>
-                        <a:rPr lang="en-US" sz="1050" dirty="0">
+                        <a:rPr lang="en-US" sz="1000" dirty="0">
                           <a:solidFill>
                             <a:srgbClr val="3B4660"/>
                           </a:solidFill>
@@ -4890,7 +4890,7 @@
                         </a:rPr>
                         <a:t>2.11×</a:t>
                       </a:r>
-                      <a:endParaRPr lang="en-US" sz="1050" dirty="0">
+                      <a:endParaRPr lang="en-US" sz="1000" dirty="0">
                         <a:latin typeface="Calibri" charset="0"/>
                         <a:ea typeface="Calibri" charset="0"/>
                         <a:cs typeface="Calibri" charset="0"/>
@@ -4948,7 +4948,7 @@
                         <a:buNone/>
                       </a:pPr>
                       <a:r>
-                        <a:rPr lang="en-US" sz="1050" dirty="0">
+                        <a:rPr lang="en-US" sz="1000" dirty="0">
                           <a:solidFill>
                             <a:srgbClr val="3B4660"/>
                           </a:solidFill>
@@ -4958,7 +4958,7 @@
                         </a:rPr>
                         <a:t>1.09×</a:t>
                       </a:r>
-                      <a:endParaRPr lang="en-US" sz="1050" dirty="0">
+                      <a:endParaRPr lang="en-US" sz="1000" dirty="0">
                         <a:latin typeface="Calibri" charset="0"/>
                         <a:ea typeface="Calibri" charset="0"/>
                         <a:cs typeface="Calibri" charset="0"/>
@@ -5016,7 +5016,7 @@
                         <a:buNone/>
                       </a:pPr>
                       <a:r>
-                        <a:rPr lang="en-US" sz="1050" dirty="0">
+                        <a:rPr lang="en-US" sz="1000" dirty="0">
                           <a:solidFill>
                             <a:srgbClr val="3B4660"/>
                           </a:solidFill>
@@ -5026,7 +5026,7 @@
                         </a:rPr>
                         <a:t>1.48×</a:t>
                       </a:r>
-                      <a:endParaRPr lang="en-US" sz="1050" dirty="0">
+                      <a:endParaRPr lang="en-US" sz="1000" dirty="0">
                         <a:latin typeface="Calibri" charset="0"/>
                         <a:ea typeface="Calibri" charset="0"/>
                         <a:cs typeface="Calibri" charset="0"/>
@@ -5076,7 +5076,7 @@
                   </a:tcPr>
                 </a:tc>
               </a:tr>
-              <a:tr h="274320">
+              <a:tr h="256032">
                 <a:tc>
                   <a:txBody>
                     <a:bodyPr/>
@@ -5086,7 +5086,7 @@
                         <a:buNone/>
                       </a:pPr>
                       <a:r>
-                        <a:rPr lang="en-US" sz="1050" dirty="0">
+                        <a:rPr lang="en-US" sz="1000" dirty="0">
                           <a:solidFill>
                             <a:srgbClr val="3B4660"/>
                           </a:solidFill>
@@ -5096,7 +5096,7 @@
                         </a:rPr>
                         <a:t>Assets a lender can charge</a:t>
                       </a:r>
-                      <a:endParaRPr lang="en-US" sz="1050" dirty="0">
+                      <a:endParaRPr lang="en-US" sz="1000" dirty="0">
                         <a:latin typeface="Calibri" charset="0"/>
                         <a:ea typeface="Calibri" charset="0"/>
                         <a:cs typeface="Calibri" charset="0"/>
@@ -5154,7 +5154,7 @@
                         <a:buNone/>
                       </a:pPr>
                       <a:r>
-                        <a:rPr lang="en-US" sz="1050" dirty="0">
+                        <a:rPr lang="en-US" sz="1000" dirty="0">
                           <a:solidFill>
                             <a:srgbClr val="3B4660"/>
                           </a:solidFill>
@@ -5164,7 +5164,7 @@
                         </a:rPr>
                         <a:t>None — ADA owns all</a:t>
                       </a:r>
-                      <a:endParaRPr lang="en-US" sz="1050" dirty="0">
+                      <a:endParaRPr lang="en-US" sz="1000" dirty="0">
                         <a:latin typeface="Calibri" charset="0"/>
                         <a:ea typeface="Calibri" charset="0"/>
                         <a:cs typeface="Calibri" charset="0"/>
@@ -5222,7 +5222,7 @@
                         <a:buNone/>
                       </a:pPr>
                       <a:r>
-                        <a:rPr lang="en-US" sz="1050" dirty="0">
+                        <a:rPr lang="en-US" sz="1000" dirty="0">
                           <a:solidFill>
                             <a:srgbClr val="3B4660"/>
                           </a:solidFill>
@@ -5232,7 +5232,7 @@
                         </a:rPr>
                         <a:t>None — expressly barred</a:t>
                       </a:r>
-                      <a:endParaRPr lang="en-US" sz="1050" dirty="0">
+                      <a:endParaRPr lang="en-US" sz="1000" dirty="0">
                         <a:latin typeface="Calibri" charset="0"/>
                         <a:ea typeface="Calibri" charset="0"/>
                         <a:cs typeface="Calibri" charset="0"/>
@@ -5290,7 +5290,7 @@
                         <a:buNone/>
                       </a:pPr>
                       <a:r>
-                        <a:rPr lang="en-US" sz="1050" dirty="0">
+                        <a:rPr lang="en-US" sz="1000" dirty="0">
                           <a:solidFill>
                             <a:srgbClr val="3B4660"/>
                           </a:solidFill>
@@ -5300,7 +5300,7 @@
                         </a:rPr>
                         <a:t>Yes — E-O-D owns fit-out</a:t>
                       </a:r>
-                      <a:endParaRPr lang="en-US" sz="1050" dirty="0">
+                      <a:endParaRPr lang="en-US" sz="1000" dirty="0">
                         <a:latin typeface="Calibri" charset="0"/>
                         <a:ea typeface="Calibri" charset="0"/>
                         <a:cs typeface="Calibri" charset="0"/>
@@ -5350,7 +5350,7 @@
                   </a:tcPr>
                 </a:tc>
               </a:tr>
-              <a:tr h="274320">
+              <a:tr h="256032">
                 <a:tc>
                   <a:txBody>
                     <a:bodyPr/>
@@ -5360,7 +5360,7 @@
                         <a:buNone/>
                       </a:pPr>
                       <a:r>
-                        <a:rPr lang="en-US" sz="1050" dirty="0">
+                        <a:rPr lang="en-US" sz="1000" dirty="0">
                           <a:solidFill>
                             <a:srgbClr val="3B4660"/>
                           </a:solidFill>
@@ -5370,7 +5370,7 @@
                         </a:rPr>
                         <a:t>Equity IRR at project level</a:t>
                       </a:r>
-                      <a:endParaRPr lang="en-US" sz="1050" dirty="0">
+                      <a:endParaRPr lang="en-US" sz="1000" dirty="0">
                         <a:latin typeface="Calibri" charset="0"/>
                         <a:ea typeface="Calibri" charset="0"/>
                         <a:cs typeface="Calibri" charset="0"/>
@@ -5428,7 +5428,7 @@
                         <a:buNone/>
                       </a:pPr>
                       <a:r>
-                        <a:rPr lang="en-US" sz="1050" dirty="0">
+                        <a:rPr lang="en-US" sz="1000" dirty="0">
                           <a:solidFill>
                             <a:srgbClr val="3B4660"/>
                           </a:solidFill>
@@ -5436,9 +5436,9 @@
                           <a:ea typeface="Calibri" pitchFamily="34" charset="-122"/>
                           <a:cs typeface="Calibri" pitchFamily="34" charset="-120"/>
                         </a:rPr>
-                        <a:t>29.4%</a:t>
+                        <a:t>Not offered — debt only</a:t>
                       </a:r>
-                      <a:endParaRPr lang="en-US" sz="1050" dirty="0">
+                      <a:endParaRPr lang="en-US" sz="1000" dirty="0">
                         <a:latin typeface="Calibri" charset="0"/>
                         <a:ea typeface="Calibri" charset="0"/>
                         <a:cs typeface="Calibri" charset="0"/>
@@ -5496,7 +5496,7 @@
                         <a:buNone/>
                       </a:pPr>
                       <a:r>
-                        <a:rPr lang="en-US" sz="1050" dirty="0">
+                        <a:rPr lang="en-US" sz="1000" dirty="0">
                           <a:solidFill>
                             <a:srgbClr val="3B4660"/>
                           </a:solidFill>
@@ -5506,7 +5506,7 @@
                         </a:rPr>
                         <a:t>5.4%</a:t>
                       </a:r>
-                      <a:endParaRPr lang="en-US" sz="1050" dirty="0">
+                      <a:endParaRPr lang="en-US" sz="1000" dirty="0">
                         <a:latin typeface="Calibri" charset="0"/>
                         <a:ea typeface="Calibri" charset="0"/>
                         <a:cs typeface="Calibri" charset="0"/>
@@ -5564,7 +5564,7 @@
                         <a:buNone/>
                       </a:pPr>
                       <a:r>
-                        <a:rPr lang="en-US" sz="1050" dirty="0">
+                        <a:rPr lang="en-US" sz="1000" dirty="0">
                           <a:solidFill>
                             <a:srgbClr val="3B4660"/>
                           </a:solidFill>
@@ -5574,7 +5574,7 @@
                         </a:rPr>
                         <a:t>8.2%</a:t>
                       </a:r>
-                      <a:endParaRPr lang="en-US" sz="1050" dirty="0">
+                      <a:endParaRPr lang="en-US" sz="1000" dirty="0">
                         <a:latin typeface="Calibri" charset="0"/>
                         <a:ea typeface="Calibri" charset="0"/>
                         <a:cs typeface="Calibri" charset="0"/>
@@ -5624,7 +5624,7 @@
                   </a:tcPr>
                 </a:tc>
               </a:tr>
-              <a:tr h="274320">
+              <a:tr h="256032">
                 <a:tc>
                   <a:txBody>
                     <a:bodyPr/>
@@ -5634,7 +5634,7 @@
                         <a:buNone/>
                       </a:pPr>
                       <a:r>
-                        <a:rPr lang="en-US" sz="1050" b="1" dirty="0">
+                        <a:rPr lang="en-US" sz="1000" b="1" dirty="0">
                           <a:solidFill>
                             <a:srgbClr val="0A1426"/>
                           </a:solidFill>
@@ -5644,7 +5644,7 @@
                         </a:rPr>
                         <a:t>Recommended instrument</a:t>
                       </a:r>
-                      <a:endParaRPr lang="en-US" sz="1050" dirty="0">
+                      <a:endParaRPr lang="en-US" sz="1000" dirty="0">
                         <a:latin typeface="Calibri" charset="0"/>
                         <a:ea typeface="Calibri" charset="0"/>
                         <a:cs typeface="Calibri" charset="0"/>
@@ -5702,7 +5702,7 @@
                         <a:buNone/>
                       </a:pPr>
                       <a:r>
-                        <a:rPr lang="en-US" sz="1050" b="1" dirty="0">
+                        <a:rPr lang="en-US" sz="1000" b="1" dirty="0">
                           <a:solidFill>
                             <a:srgbClr val="0A1426"/>
                           </a:solidFill>
@@ -5712,7 +5712,7 @@
                         </a:rPr>
                         <a:t>CGTMSE debt</a:t>
                       </a:r>
-                      <a:endParaRPr lang="en-US" sz="1050" dirty="0">
+                      <a:endParaRPr lang="en-US" sz="1000" dirty="0">
                         <a:latin typeface="Calibri" charset="0"/>
                         <a:ea typeface="Calibri" charset="0"/>
                         <a:cs typeface="Calibri" charset="0"/>
@@ -5770,7 +5770,7 @@
                         <a:buNone/>
                       </a:pPr>
                       <a:r>
-                        <a:rPr lang="en-US" sz="1050" b="1" dirty="0">
+                        <a:rPr lang="en-US" sz="1000" b="1" dirty="0">
                           <a:solidFill>
                             <a:srgbClr val="0A1426"/>
                           </a:solidFill>
@@ -5780,7 +5780,7 @@
                         </a:rPr>
                         <a:t>CGTMSE debt, at reserve</a:t>
                       </a:r>
-                      <a:endParaRPr lang="en-US" sz="1050" dirty="0">
+                      <a:endParaRPr lang="en-US" sz="1000" dirty="0">
                         <a:latin typeface="Calibri" charset="0"/>
                         <a:ea typeface="Calibri" charset="0"/>
                         <a:cs typeface="Calibri" charset="0"/>
@@ -5838,7 +5838,7 @@
                         <a:buNone/>
                       </a:pPr>
                       <a:r>
-                        <a:rPr lang="en-US" sz="1050" b="1" dirty="0">
+                        <a:rPr lang="en-US" sz="1000" b="1" dirty="0">
                           <a:solidFill>
                             <a:srgbClr val="0A1426"/>
                           </a:solidFill>
@@ -5848,7 +5848,7 @@
                         </a:rPr>
                         <a:t>CGTMSE debt</a:t>
                       </a:r>
-                      <a:endParaRPr lang="en-US" sz="1050" dirty="0">
+                      <a:endParaRPr lang="en-US" sz="1000" dirty="0">
                         <a:latin typeface="Calibri" charset="0"/>
                         <a:ea typeface="Calibri" charset="0"/>
                         <a:cs typeface="Calibri" charset="0"/>
@@ -5910,7 +5910,7 @@
         </p:nvSpPr>
         <p:spPr>
           <a:xfrm>
-            <a:off x="566928" y="5064125"/>
+            <a:off x="566928" y="4955032"/>
             <a:ext cx="11057839" cy="1267684"/>
           </a:xfrm>
           <a:prstGeom prst="roundRect">
@@ -5937,7 +5937,7 @@
         </p:nvSpPr>
         <p:spPr>
           <a:xfrm>
-            <a:off x="804672" y="5173853"/>
+            <a:off x="804672" y="5064760"/>
             <a:ext cx="2743200" cy="182880"/>
           </a:xfrm>
           <a:prstGeom prst="rect">
@@ -5976,7 +5976,7 @@
         </p:nvSpPr>
         <p:spPr>
           <a:xfrm>
-            <a:off x="804672" y="5356733"/>
+            <a:off x="804672" y="5247640"/>
             <a:ext cx="10582351" cy="212649"/>
           </a:xfrm>
           <a:prstGeom prst="rect">
@@ -6004,7 +6004,7 @@
                 <a:ea typeface="Calibri" pitchFamily="34" charset="-122"/>
                 <a:cs typeface="Calibri" pitchFamily="34" charset="-120"/>
               </a:rPr>
-              <a:t>The same conclusion three times, for the same reason</a:t>
+              <a:t>One instrument, three different routes to it</a:t>
             </a:r>
             <a:endParaRPr lang="en-US" sz="1400" dirty="0"/>
           </a:p>
@@ -6018,7 +6018,7 @@
         </p:nvSpPr>
         <p:spPr>
           <a:xfrm>
-            <a:off x="804672" y="5624246"/>
+            <a:off x="804672" y="5515153"/>
             <a:ext cx="10582351" cy="634411"/>
           </a:xfrm>
           <a:prstGeom prst="rect">
@@ -6046,7 +6046,7 @@
                 <a:ea typeface="Calibri" pitchFamily="34" charset="-122"/>
                 <a:cs typeface="Calibri" pitchFamily="34" charset="-120"/>
               </a:rPr>
-              <a:t>None of the three clears an equity hurdle at project level, and not because any is a bad project: a single park generating ₹1–2.5 crore of mature EBITDA cannot pay a 22% return and still leave an operator's margin. Equity works on a portfolio and a brand, not one licence at a time. Two of the three out-earn guaranteed debt comfortably — fund them with it and keep the spread.</a:t>
+              <a:t>Geeta Govind Vatika is offered on debt only: a guaranteed facility supplies the whole ₹1.00 Cr at 12.10%, no collateral and no dilution, so there is nothing an equity structure would buy that it does not already provide. Karnal earns 19.5% and Ramayan Vatika 11.4%; neither clears an equity hurdle at project level. A single park generating ₹1–2.5 crore of mature EBITDA cannot pay a 22% return and leave an operator's margin. Equity belongs at company level, where it buys a portfolio rather than one wasting licence.</a:t>
             </a:r>
             <a:endParaRPr lang="en-US" sz="900" dirty="0"/>
           </a:p>

--- a/pptx/EOD-Project-Finance-Portfolio.pptx
+++ b/pptx/EOD-Project-Finance-Portfolio.pptx
@@ -9240,7 +9240,7 @@
                 <a:ea typeface="Calibri" pitchFamily="34" charset="-122"/>
                 <a:cs typeface="Calibri" pitchFamily="34" charset="-120"/>
               </a:rPr>
-              <a:t>Only if each clears its walk-away price: ₹76.8 L a year at Geeta Govind Vatika, ₹35.5 L at Ramayan Vatika. Winning at the wrong price is worse than losing.</a:t>
+              <a:t>Only on award, and only at a price the board has approved in advance. Both are auctions, both fees escalate for the full term, and winning at the wrong price is worse than losing.</a:t>
             </a:r>
             <a:endParaRPr lang="en-US" sz="1050" dirty="0"/>
           </a:p>

--- a/pptx/EOD-Project-Finance-Portfolio.pptx
+++ b/pptx/EOD-Project-Finance-Portfolio.pptx
@@ -4066,7 +4066,7 @@
                           <a:ea typeface="Calibri" pitchFamily="34" charset="-122"/>
                           <a:cs typeface="Calibri" pitchFamily="34" charset="-120"/>
                         </a:rPr>
-                        <a:t>26.0%</a:t>
+                        <a:t>31.3%</a:t>
                       </a:r>
                       <a:endParaRPr lang="en-US" sz="1000" dirty="0">
                         <a:latin typeface="Calibri" charset="0"/>
@@ -4340,7 +4340,7 @@
                           <a:ea typeface="Calibri" pitchFamily="34" charset="-122"/>
                           <a:cs typeface="Calibri" pitchFamily="34" charset="-120"/>
                         </a:rPr>
-                        <a:t>55.2%</a:t>
+                        <a:t>52.4%</a:t>
                       </a:r>
                       <a:endParaRPr lang="en-US" sz="1000" dirty="0">
                         <a:latin typeface="Calibri" charset="0"/>
@@ -4614,7 +4614,7 @@
                           <a:ea typeface="Calibri" pitchFamily="34" charset="-122"/>
                           <a:cs typeface="Calibri" pitchFamily="34" charset="-120"/>
                         </a:rPr>
-                        <a:t>+43.1 pp</a:t>
+                        <a:t>+40.3 pp</a:t>
                       </a:r>
                       <a:endParaRPr lang="en-US" sz="1000" dirty="0">
                         <a:latin typeface="Calibri" charset="0"/>
@@ -4888,7 +4888,7 @@
                           <a:ea typeface="Calibri" pitchFamily="34" charset="-122"/>
                           <a:cs typeface="Calibri" pitchFamily="34" charset="-120"/>
                         </a:rPr>
-                        <a:t>2.11×</a:t>
+                        <a:t>1.70×</a:t>
                       </a:r>
                       <a:endParaRPr lang="en-US" sz="1000" dirty="0">
                         <a:latin typeface="Calibri" charset="0"/>
@@ -9410,7 +9410,7 @@
                 <a:ea typeface="Calibri" pitchFamily="34" charset="-122"/>
                 <a:cs typeface="Calibri" pitchFamily="34" charset="-120"/>
               </a:rPr>
-              <a:t>With ₹10 Cr of guaranteed debt in place the round need not be ₹16 crore. ₹6–8 crore covers what debt cannot reach, at roughly half the dilution — or a CCD at 21.2% without repricing the company.</a:t>
+              <a:t>With ₹10 Cr of guaranteed debt in place the round need not be ₹16 crore. ₹6–8 crore covers what debt cannot reach, at roughly half the dilution — or a CCD at 21.5% without repricing the company.</a:t>
             </a:r>
             <a:endParaRPr lang="en-US" sz="1050" dirty="0"/>
           </a:p>

--- a/pptx/EOD-Project-Finance-Portfolio.pptx
+++ b/pptx/EOD-Project-Finance-Portfolio.pptx
@@ -4066,7 +4066,7 @@
                           <a:ea typeface="Calibri" pitchFamily="34" charset="-122"/>
                           <a:cs typeface="Calibri" pitchFamily="34" charset="-120"/>
                         </a:rPr>
-                        <a:t>31.3%</a:t>
+                        <a:t>32.3%</a:t>
                       </a:r>
                       <a:endParaRPr lang="en-US" sz="1000" dirty="0">
                         <a:latin typeface="Calibri" charset="0"/>
@@ -4340,7 +4340,7 @@
                           <a:ea typeface="Calibri" pitchFamily="34" charset="-122"/>
                           <a:cs typeface="Calibri" pitchFamily="34" charset="-120"/>
                         </a:rPr>
-                        <a:t>52.4%</a:t>
+                        <a:t>55.5%</a:t>
                       </a:r>
                       <a:endParaRPr lang="en-US" sz="1000" dirty="0">
                         <a:latin typeface="Calibri" charset="0"/>
@@ -4614,7 +4614,7 @@
                           <a:ea typeface="Calibri" pitchFamily="34" charset="-122"/>
                           <a:cs typeface="Calibri" pitchFamily="34" charset="-120"/>
                         </a:rPr>
-                        <a:t>+40.3 pp</a:t>
+                        <a:t>+43.4 pp</a:t>
                       </a:r>
                       <a:endParaRPr lang="en-US" sz="1000" dirty="0">
                         <a:latin typeface="Calibri" charset="0"/>
@@ -4888,7 +4888,7 @@
                           <a:ea typeface="Calibri" pitchFamily="34" charset="-122"/>
                           <a:cs typeface="Calibri" pitchFamily="34" charset="-120"/>
                         </a:rPr>
-                        <a:t>1.70×</a:t>
+                        <a:t>1.87×</a:t>
                       </a:r>
                       <a:endParaRPr lang="en-US" sz="1000" dirty="0">
                         <a:latin typeface="Calibri" charset="0"/>
